--- a/docs/pptx/carbo/ritu-carbo-linsubhr-sens-anemia3.pptx
+++ b/docs/pptx/carbo/ritu-carbo-linsubhr-sens-anemia3.pptx
@@ -2443,7 +2443,7 @@
           </p:nvSpPr>
           <p:spPr>
             <a:xfrm>
-              <a:off x="868706" y="2073503"/>
+              <a:off x="869934" y="2073503"/>
               <a:ext cx="0" cy="3649639"/>
             </a:xfrm>
             <a:custGeom>
@@ -2486,7 +2486,7 @@
           </p:nvSpPr>
           <p:spPr>
             <a:xfrm>
-              <a:off x="2695888" y="2073503"/>
+              <a:off x="2693907" y="2073503"/>
               <a:ext cx="0" cy="3649639"/>
             </a:xfrm>
             <a:custGeom>
@@ -2529,7 +2529,7 @@
           </p:nvSpPr>
           <p:spPr>
             <a:xfrm>
-              <a:off x="4523069" y="2073503"/>
+              <a:off x="4517879" y="2073503"/>
               <a:ext cx="0" cy="3649639"/>
             </a:xfrm>
             <a:custGeom>
@@ -2572,7 +2572,7 @@
           </p:nvSpPr>
           <p:spPr>
             <a:xfrm>
-              <a:off x="6350251" y="2073503"/>
+              <a:off x="6341852" y="2073503"/>
               <a:ext cx="0" cy="3649639"/>
             </a:xfrm>
             <a:custGeom>
@@ -2615,7 +2615,7 @@
           </p:nvSpPr>
           <p:spPr>
             <a:xfrm>
-              <a:off x="8177433" y="2073503"/>
+              <a:off x="8165824" y="2073503"/>
               <a:ext cx="0" cy="3649639"/>
             </a:xfrm>
             <a:custGeom>
@@ -2873,7 +2873,7 @@
           </p:nvSpPr>
           <p:spPr>
             <a:xfrm>
-              <a:off x="1782297" y="2073503"/>
+              <a:off x="1781921" y="2073503"/>
               <a:ext cx="0" cy="3649639"/>
             </a:xfrm>
             <a:custGeom>
@@ -2916,7 +2916,7 @@
           </p:nvSpPr>
           <p:spPr>
             <a:xfrm>
-              <a:off x="3609478" y="2073503"/>
+              <a:off x="3605893" y="2073503"/>
               <a:ext cx="0" cy="3649639"/>
             </a:xfrm>
             <a:custGeom>
@@ -2959,7 +2959,7 @@
           </p:nvSpPr>
           <p:spPr>
             <a:xfrm>
-              <a:off x="5436660" y="2073503"/>
+              <a:off x="5429866" y="2073503"/>
               <a:ext cx="0" cy="3649639"/>
             </a:xfrm>
             <a:custGeom>
@@ -3002,7 +3002,7 @@
           </p:nvSpPr>
           <p:spPr>
             <a:xfrm>
-              <a:off x="7263842" y="2073503"/>
+              <a:off x="7253838" y="2073503"/>
               <a:ext cx="0" cy="3649639"/>
             </a:xfrm>
             <a:custGeom>
@@ -3046,530 +3046,530 @@
           <p:spPr>
             <a:xfrm>
               <a:off x="1172049" y="2073503"/>
-              <a:ext cx="7090630" cy="3460234"/>
+              <a:ext cx="7090630" cy="3458791"/>
             </a:xfrm>
             <a:custGeom>
               <a:avLst/>
               <a:pathLst>
-                <a:path w="7090630" h="3460234">
+                <a:path w="7090630" h="3458791">
                   <a:moveTo>
-                    <a:pt x="1999032" y="0"/>
+                    <a:pt x="1996424" y="0"/>
                   </a:moveTo>
                   <a:lnTo>
-                    <a:pt x="2005430" y="22522"/>
-                  </a:lnTo>
-                  <a:lnTo>
-                    <a:pt x="2077053" y="257516"/>
-                  </a:lnTo>
-                  <a:lnTo>
-                    <a:pt x="2148675" y="476555"/>
-                  </a:lnTo>
-                  <a:lnTo>
-                    <a:pt x="2220298" y="680723"/>
-                  </a:lnTo>
-                  <a:lnTo>
-                    <a:pt x="2291920" y="871030"/>
-                  </a:lnTo>
-                  <a:lnTo>
-                    <a:pt x="2363543" y="1048416"/>
-                  </a:lnTo>
-                  <a:lnTo>
-                    <a:pt x="2435165" y="1213758"/>
-                  </a:lnTo>
-                  <a:lnTo>
-                    <a:pt x="2506788" y="1367875"/>
-                  </a:lnTo>
-                  <a:lnTo>
-                    <a:pt x="2578410" y="1511529"/>
-                  </a:lnTo>
-                  <a:lnTo>
-                    <a:pt x="2650033" y="1645429"/>
-                  </a:lnTo>
-                  <a:lnTo>
-                    <a:pt x="2721655" y="1770239"/>
-                  </a:lnTo>
-                  <a:lnTo>
-                    <a:pt x="2793278" y="1886574"/>
-                  </a:lnTo>
-                  <a:lnTo>
-                    <a:pt x="2864901" y="1995011"/>
-                  </a:lnTo>
-                  <a:lnTo>
-                    <a:pt x="2936523" y="2096087"/>
-                  </a:lnTo>
-                  <a:lnTo>
-                    <a:pt x="3008146" y="2190299"/>
-                  </a:lnTo>
-                  <a:lnTo>
-                    <a:pt x="3079768" y="2278116"/>
-                  </a:lnTo>
-                  <a:lnTo>
-                    <a:pt x="3151391" y="2359970"/>
-                  </a:lnTo>
-                  <a:lnTo>
-                    <a:pt x="3223013" y="2436267"/>
-                  </a:lnTo>
-                  <a:lnTo>
-                    <a:pt x="3294636" y="2507384"/>
-                  </a:lnTo>
-                  <a:lnTo>
-                    <a:pt x="3366258" y="2573672"/>
-                  </a:lnTo>
-                  <a:lnTo>
-                    <a:pt x="3437881" y="2635460"/>
-                  </a:lnTo>
-                  <a:lnTo>
-                    <a:pt x="3509503" y="2654389"/>
-                  </a:lnTo>
-                  <a:lnTo>
-                    <a:pt x="3581126" y="2654544"/>
-                  </a:lnTo>
-                  <a:lnTo>
-                    <a:pt x="3652748" y="2654699"/>
-                  </a:lnTo>
-                  <a:lnTo>
-                    <a:pt x="3724371" y="2654854"/>
-                  </a:lnTo>
-                  <a:lnTo>
-                    <a:pt x="3795993" y="2655009"/>
-                  </a:lnTo>
-                  <a:lnTo>
-                    <a:pt x="3867616" y="2655164"/>
-                  </a:lnTo>
-                  <a:lnTo>
-                    <a:pt x="3939238" y="2655319"/>
-                  </a:lnTo>
-                  <a:lnTo>
-                    <a:pt x="4010861" y="2655474"/>
-                  </a:lnTo>
-                  <a:lnTo>
-                    <a:pt x="4082483" y="2655629"/>
-                  </a:lnTo>
-                  <a:lnTo>
-                    <a:pt x="4154106" y="2655784"/>
-                  </a:lnTo>
-                  <a:lnTo>
-                    <a:pt x="4225729" y="2655939"/>
-                  </a:lnTo>
-                  <a:lnTo>
-                    <a:pt x="4297351" y="2656094"/>
-                  </a:lnTo>
-                  <a:lnTo>
-                    <a:pt x="4368974" y="2656249"/>
-                  </a:lnTo>
-                  <a:lnTo>
-                    <a:pt x="4440596" y="2656404"/>
-                  </a:lnTo>
-                  <a:lnTo>
-                    <a:pt x="4512219" y="2656558"/>
-                  </a:lnTo>
-                  <a:lnTo>
-                    <a:pt x="4583841" y="2656713"/>
-                  </a:lnTo>
-                  <a:lnTo>
-                    <a:pt x="4655464" y="2656868"/>
-                  </a:lnTo>
-                  <a:lnTo>
-                    <a:pt x="4727086" y="2657023"/>
-                  </a:lnTo>
-                  <a:lnTo>
-                    <a:pt x="4798709" y="2657177"/>
-                  </a:lnTo>
-                  <a:lnTo>
-                    <a:pt x="4870331" y="2657332"/>
-                  </a:lnTo>
-                  <a:lnTo>
-                    <a:pt x="4941954" y="2657486"/>
-                  </a:lnTo>
-                  <a:lnTo>
-                    <a:pt x="5013576" y="2657641"/>
-                  </a:lnTo>
-                  <a:lnTo>
-                    <a:pt x="5085199" y="2657796"/>
-                  </a:lnTo>
-                  <a:lnTo>
-                    <a:pt x="5156821" y="2657950"/>
-                  </a:lnTo>
-                  <a:lnTo>
-                    <a:pt x="5228444" y="2658105"/>
-                  </a:lnTo>
-                  <a:lnTo>
-                    <a:pt x="5300066" y="2658259"/>
-                  </a:lnTo>
-                  <a:lnTo>
-                    <a:pt x="5371689" y="2658414"/>
-                  </a:lnTo>
-                  <a:lnTo>
-                    <a:pt x="5443311" y="2658568"/>
-                  </a:lnTo>
-                  <a:lnTo>
-                    <a:pt x="5514934" y="2658722"/>
-                  </a:lnTo>
-                  <a:lnTo>
-                    <a:pt x="5586557" y="2658877"/>
-                  </a:lnTo>
-                  <a:lnTo>
-                    <a:pt x="5658179" y="2659031"/>
-                  </a:lnTo>
-                  <a:lnTo>
-                    <a:pt x="5729802" y="2659185"/>
-                  </a:lnTo>
-                  <a:lnTo>
-                    <a:pt x="5801424" y="2659340"/>
-                  </a:lnTo>
-                  <a:lnTo>
-                    <a:pt x="5873047" y="2659494"/>
-                  </a:lnTo>
-                  <a:lnTo>
-                    <a:pt x="5944669" y="2659648"/>
-                  </a:lnTo>
-                  <a:lnTo>
-                    <a:pt x="6016292" y="2659802"/>
-                  </a:lnTo>
-                  <a:lnTo>
-                    <a:pt x="6087914" y="2659957"/>
-                  </a:lnTo>
-                  <a:lnTo>
-                    <a:pt x="6159537" y="2660111"/>
-                  </a:lnTo>
-                  <a:lnTo>
-                    <a:pt x="6231159" y="2660265"/>
-                  </a:lnTo>
-                  <a:lnTo>
-                    <a:pt x="6302782" y="2660419"/>
-                  </a:lnTo>
-                  <a:lnTo>
-                    <a:pt x="6374404" y="2660573"/>
-                  </a:lnTo>
-                  <a:lnTo>
-                    <a:pt x="6446027" y="2660727"/>
-                  </a:lnTo>
-                  <a:lnTo>
-                    <a:pt x="6517649" y="2660881"/>
-                  </a:lnTo>
-                  <a:lnTo>
-                    <a:pt x="6589272" y="2661035"/>
-                  </a:lnTo>
-                  <a:lnTo>
-                    <a:pt x="6660894" y="2661189"/>
-                  </a:lnTo>
-                  <a:lnTo>
-                    <a:pt x="6732517" y="2661343"/>
-                  </a:lnTo>
-                  <a:lnTo>
-                    <a:pt x="6804139" y="2661497"/>
-                  </a:lnTo>
-                  <a:lnTo>
-                    <a:pt x="6875762" y="2661650"/>
-                  </a:lnTo>
-                  <a:lnTo>
-                    <a:pt x="6947385" y="2661804"/>
-                  </a:lnTo>
-                  <a:lnTo>
-                    <a:pt x="7019007" y="2661958"/>
-                  </a:lnTo>
-                  <a:lnTo>
-                    <a:pt x="7090630" y="2662112"/>
-                  </a:lnTo>
-                  <a:lnTo>
-                    <a:pt x="7090630" y="3460234"/>
-                  </a:lnTo>
-                  <a:lnTo>
-                    <a:pt x="7019007" y="3458522"/>
-                  </a:lnTo>
-                  <a:lnTo>
-                    <a:pt x="6947385" y="3456684"/>
-                  </a:lnTo>
-                  <a:lnTo>
-                    <a:pt x="6875762" y="3454713"/>
-                  </a:lnTo>
-                  <a:lnTo>
-                    <a:pt x="6804139" y="3452599"/>
-                  </a:lnTo>
-                  <a:lnTo>
-                    <a:pt x="6732517" y="3450330"/>
-                  </a:lnTo>
-                  <a:lnTo>
-                    <a:pt x="6660894" y="3447896"/>
-                  </a:lnTo>
-                  <a:lnTo>
-                    <a:pt x="6589272" y="3445285"/>
-                  </a:lnTo>
-                  <a:lnTo>
-                    <a:pt x="6517649" y="3442483"/>
-                  </a:lnTo>
-                  <a:lnTo>
-                    <a:pt x="6446027" y="3439477"/>
-                  </a:lnTo>
-                  <a:lnTo>
-                    <a:pt x="6374404" y="3436253"/>
-                  </a:lnTo>
-                  <a:lnTo>
-                    <a:pt x="6302782" y="3432794"/>
-                  </a:lnTo>
-                  <a:lnTo>
-                    <a:pt x="6231159" y="3429082"/>
-                  </a:lnTo>
-                  <a:lnTo>
-                    <a:pt x="6159537" y="3425101"/>
-                  </a:lnTo>
-                  <a:lnTo>
-                    <a:pt x="6087914" y="3420829"/>
-                  </a:lnTo>
-                  <a:lnTo>
-                    <a:pt x="6016292" y="3416246"/>
-                  </a:lnTo>
-                  <a:lnTo>
-                    <a:pt x="5944669" y="3411330"/>
-                  </a:lnTo>
-                  <a:lnTo>
-                    <a:pt x="5873047" y="3406055"/>
-                  </a:lnTo>
-                  <a:lnTo>
-                    <a:pt x="5801424" y="3400396"/>
-                  </a:lnTo>
-                  <a:lnTo>
-                    <a:pt x="5729802" y="3394325"/>
-                  </a:lnTo>
-                  <a:lnTo>
-                    <a:pt x="5658179" y="3387811"/>
-                  </a:lnTo>
-                  <a:lnTo>
-                    <a:pt x="5586557" y="3380824"/>
-                  </a:lnTo>
-                  <a:lnTo>
-                    <a:pt x="5514934" y="3373327"/>
-                  </a:lnTo>
-                  <a:lnTo>
-                    <a:pt x="5443311" y="3365284"/>
-                  </a:lnTo>
-                  <a:lnTo>
-                    <a:pt x="5371689" y="3356655"/>
-                  </a:lnTo>
-                  <a:lnTo>
-                    <a:pt x="5300066" y="3347398"/>
-                  </a:lnTo>
-                  <a:lnTo>
-                    <a:pt x="5228444" y="3337467"/>
-                  </a:lnTo>
-                  <a:lnTo>
-                    <a:pt x="5156821" y="3326812"/>
-                  </a:lnTo>
-                  <a:lnTo>
-                    <a:pt x="5085199" y="3315381"/>
-                  </a:lnTo>
-                  <a:lnTo>
-                    <a:pt x="5013576" y="3303118"/>
-                  </a:lnTo>
-                  <a:lnTo>
-                    <a:pt x="4941954" y="3289961"/>
-                  </a:lnTo>
-                  <a:lnTo>
-                    <a:pt x="4870331" y="3275846"/>
-                  </a:lnTo>
-                  <a:lnTo>
-                    <a:pt x="4798709" y="3260703"/>
-                  </a:lnTo>
-                  <a:lnTo>
-                    <a:pt x="4727086" y="3244457"/>
-                  </a:lnTo>
-                  <a:lnTo>
-                    <a:pt x="4655464" y="3227027"/>
-                  </a:lnTo>
-                  <a:lnTo>
-                    <a:pt x="4583841" y="3208328"/>
-                  </a:lnTo>
-                  <a:lnTo>
-                    <a:pt x="4512219" y="3188267"/>
-                  </a:lnTo>
-                  <a:lnTo>
-                    <a:pt x="4440596" y="3166745"/>
-                  </a:lnTo>
-                  <a:lnTo>
-                    <a:pt x="4368974" y="3143655"/>
-                  </a:lnTo>
-                  <a:lnTo>
-                    <a:pt x="4297351" y="3118883"/>
-                  </a:lnTo>
-                  <a:lnTo>
-                    <a:pt x="4225729" y="3092307"/>
-                  </a:lnTo>
-                  <a:lnTo>
-                    <a:pt x="4154106" y="3063795"/>
-                  </a:lnTo>
-                  <a:lnTo>
-                    <a:pt x="4082483" y="3033207"/>
-                  </a:lnTo>
-                  <a:lnTo>
-                    <a:pt x="4010861" y="3000390"/>
-                  </a:lnTo>
-                  <a:lnTo>
-                    <a:pt x="3939238" y="2965183"/>
-                  </a:lnTo>
-                  <a:lnTo>
-                    <a:pt x="3867616" y="2927411"/>
-                  </a:lnTo>
-                  <a:lnTo>
-                    <a:pt x="3795993" y="2886889"/>
-                  </a:lnTo>
-                  <a:lnTo>
-                    <a:pt x="3724371" y="2843415"/>
-                  </a:lnTo>
-                  <a:lnTo>
-                    <a:pt x="3652748" y="2796774"/>
-                  </a:lnTo>
-                  <a:lnTo>
-                    <a:pt x="3581126" y="2746736"/>
-                  </a:lnTo>
-                  <a:lnTo>
-                    <a:pt x="3509503" y="2693053"/>
-                  </a:lnTo>
-                  <a:lnTo>
-                    <a:pt x="3437881" y="2654233"/>
-                  </a:lnTo>
-                  <a:lnTo>
-                    <a:pt x="3366258" y="2654078"/>
-                  </a:lnTo>
-                  <a:lnTo>
-                    <a:pt x="3294636" y="2653923"/>
-                  </a:lnTo>
-                  <a:lnTo>
-                    <a:pt x="3223013" y="2653768"/>
-                  </a:lnTo>
-                  <a:lnTo>
-                    <a:pt x="3151391" y="2653612"/>
-                  </a:lnTo>
-                  <a:lnTo>
-                    <a:pt x="3079768" y="2653457"/>
-                  </a:lnTo>
-                  <a:lnTo>
-                    <a:pt x="3008146" y="2653301"/>
-                  </a:lnTo>
-                  <a:lnTo>
-                    <a:pt x="2936523" y="2653146"/>
-                  </a:lnTo>
-                  <a:lnTo>
-                    <a:pt x="2864901" y="2652991"/>
-                  </a:lnTo>
-                  <a:lnTo>
-                    <a:pt x="2793278" y="2652835"/>
-                  </a:lnTo>
-                  <a:lnTo>
-                    <a:pt x="2721655" y="2652680"/>
-                  </a:lnTo>
-                  <a:lnTo>
-                    <a:pt x="2650033" y="2652524"/>
-                  </a:lnTo>
-                  <a:lnTo>
-                    <a:pt x="2578410" y="2652369"/>
-                  </a:lnTo>
-                  <a:lnTo>
-                    <a:pt x="2506788" y="2652213"/>
-                  </a:lnTo>
-                  <a:lnTo>
-                    <a:pt x="2435165" y="2652057"/>
-                  </a:lnTo>
-                  <a:lnTo>
-                    <a:pt x="2363543" y="2651902"/>
-                  </a:lnTo>
-                  <a:lnTo>
-                    <a:pt x="2291920" y="2651746"/>
-                  </a:lnTo>
-                  <a:lnTo>
-                    <a:pt x="2220298" y="2651590"/>
-                  </a:lnTo>
-                  <a:lnTo>
-                    <a:pt x="2148675" y="2651435"/>
-                  </a:lnTo>
-                  <a:lnTo>
-                    <a:pt x="2077053" y="2651279"/>
-                  </a:lnTo>
-                  <a:lnTo>
-                    <a:pt x="2005430" y="2651123"/>
-                  </a:lnTo>
-                  <a:lnTo>
-                    <a:pt x="1933808" y="2650967"/>
-                  </a:lnTo>
-                  <a:lnTo>
-                    <a:pt x="1862185" y="2650812"/>
-                  </a:lnTo>
-                  <a:lnTo>
-                    <a:pt x="1790563" y="2650656"/>
-                  </a:lnTo>
-                  <a:lnTo>
-                    <a:pt x="1718940" y="2650500"/>
-                  </a:lnTo>
-                  <a:lnTo>
-                    <a:pt x="1647318" y="2650344"/>
-                  </a:lnTo>
-                  <a:lnTo>
-                    <a:pt x="1575695" y="2650188"/>
-                  </a:lnTo>
-                  <a:lnTo>
-                    <a:pt x="1504073" y="2650032"/>
-                  </a:lnTo>
-                  <a:lnTo>
-                    <a:pt x="1432450" y="2649876"/>
-                  </a:lnTo>
-                  <a:lnTo>
-                    <a:pt x="1360827" y="2649720"/>
-                  </a:lnTo>
-                  <a:lnTo>
-                    <a:pt x="1289205" y="2649564"/>
-                  </a:lnTo>
-                  <a:lnTo>
-                    <a:pt x="1217582" y="2649408"/>
-                  </a:lnTo>
-                  <a:lnTo>
-                    <a:pt x="1145960" y="2649251"/>
-                  </a:lnTo>
-                  <a:lnTo>
-                    <a:pt x="1074337" y="2649095"/>
-                  </a:lnTo>
-                  <a:lnTo>
-                    <a:pt x="1002715" y="2648939"/>
-                  </a:lnTo>
-                  <a:lnTo>
-                    <a:pt x="931092" y="2648783"/>
-                  </a:lnTo>
-                  <a:lnTo>
-                    <a:pt x="859470" y="2648627"/>
-                  </a:lnTo>
-                  <a:lnTo>
-                    <a:pt x="787847" y="2648470"/>
-                  </a:lnTo>
-                  <a:lnTo>
-                    <a:pt x="716225" y="2648314"/>
-                  </a:lnTo>
-                  <a:lnTo>
-                    <a:pt x="644602" y="2648158"/>
-                  </a:lnTo>
-                  <a:lnTo>
-                    <a:pt x="572980" y="2648001"/>
-                  </a:lnTo>
-                  <a:lnTo>
-                    <a:pt x="501357" y="2647845"/>
-                  </a:lnTo>
-                  <a:lnTo>
-                    <a:pt x="429735" y="2647689"/>
-                  </a:lnTo>
-                  <a:lnTo>
-                    <a:pt x="358112" y="2647532"/>
-                  </a:lnTo>
-                  <a:lnTo>
-                    <a:pt x="286490" y="2647376"/>
-                  </a:lnTo>
-                  <a:lnTo>
-                    <a:pt x="214867" y="2647219"/>
-                  </a:lnTo>
-                  <a:lnTo>
-                    <a:pt x="143245" y="2647063"/>
-                  </a:lnTo>
-                  <a:lnTo>
-                    <a:pt x="71622" y="2646906"/>
-                  </a:lnTo>
-                  <a:lnTo>
-                    <a:pt x="0" y="2646749"/>
+                    <a:pt x="2005430" y="31214"/>
+                  </a:lnTo>
+                  <a:lnTo>
+                    <a:pt x="2077053" y="262803"/>
+                  </a:lnTo>
+                  <a:lnTo>
+                    <a:pt x="2148675" y="478857"/>
+                  </a:lnTo>
+                  <a:lnTo>
+                    <a:pt x="2220298" y="680419"/>
+                  </a:lnTo>
+                  <a:lnTo>
+                    <a:pt x="2291920" y="868461"/>
+                  </a:lnTo>
+                  <a:lnTo>
+                    <a:pt x="2363543" y="1043889"/>
+                  </a:lnTo>
+                  <a:lnTo>
+                    <a:pt x="2435165" y="1207550"/>
+                  </a:lnTo>
+                  <a:lnTo>
+                    <a:pt x="2506788" y="1360232"/>
+                  </a:lnTo>
+                  <a:lnTo>
+                    <a:pt x="2578410" y="1502673"/>
+                  </a:lnTo>
+                  <a:lnTo>
+                    <a:pt x="2650033" y="1635560"/>
+                  </a:lnTo>
+                  <a:lnTo>
+                    <a:pt x="2721655" y="1759532"/>
+                  </a:lnTo>
+                  <a:lnTo>
+                    <a:pt x="2793278" y="1875189"/>
+                  </a:lnTo>
+                  <a:lnTo>
+                    <a:pt x="2864901" y="1983088"/>
+                  </a:lnTo>
+                  <a:lnTo>
+                    <a:pt x="2936523" y="2083749"/>
+                  </a:lnTo>
+                  <a:lnTo>
+                    <a:pt x="3008146" y="2177658"/>
+                  </a:lnTo>
+                  <a:lnTo>
+                    <a:pt x="3079768" y="2265268"/>
+                  </a:lnTo>
+                  <a:lnTo>
+                    <a:pt x="3151391" y="2347001"/>
+                  </a:lnTo>
+                  <a:lnTo>
+                    <a:pt x="3223013" y="2423251"/>
+                  </a:lnTo>
+                  <a:lnTo>
+                    <a:pt x="3294636" y="2494387"/>
+                  </a:lnTo>
+                  <a:lnTo>
+                    <a:pt x="3366258" y="2560752"/>
+                  </a:lnTo>
+                  <a:lnTo>
+                    <a:pt x="3437881" y="2622664"/>
+                  </a:lnTo>
+                  <a:lnTo>
+                    <a:pt x="3509503" y="2653589"/>
+                  </a:lnTo>
+                  <a:lnTo>
+                    <a:pt x="3581126" y="2652082"/>
+                  </a:lnTo>
+                  <a:lnTo>
+                    <a:pt x="3652748" y="2650572"/>
+                  </a:lnTo>
+                  <a:lnTo>
+                    <a:pt x="3724371" y="2649059"/>
+                  </a:lnTo>
+                  <a:lnTo>
+                    <a:pt x="3795993" y="2647544"/>
+                  </a:lnTo>
+                  <a:lnTo>
+                    <a:pt x="3867616" y="2646026"/>
+                  </a:lnTo>
+                  <a:lnTo>
+                    <a:pt x="3939238" y="2644505"/>
+                  </a:lnTo>
+                  <a:lnTo>
+                    <a:pt x="4010861" y="2642981"/>
+                  </a:lnTo>
+                  <a:lnTo>
+                    <a:pt x="4082483" y="2641455"/>
+                  </a:lnTo>
+                  <a:lnTo>
+                    <a:pt x="4154106" y="2639925"/>
+                  </a:lnTo>
+                  <a:lnTo>
+                    <a:pt x="4225729" y="2638393"/>
+                  </a:lnTo>
+                  <a:lnTo>
+                    <a:pt x="4297351" y="2636859"/>
+                  </a:lnTo>
+                  <a:lnTo>
+                    <a:pt x="4368974" y="2635321"/>
+                  </a:lnTo>
+                  <a:lnTo>
+                    <a:pt x="4440596" y="2633781"/>
+                  </a:lnTo>
+                  <a:lnTo>
+                    <a:pt x="4512219" y="2632238"/>
+                  </a:lnTo>
+                  <a:lnTo>
+                    <a:pt x="4583841" y="2630692"/>
+                  </a:lnTo>
+                  <a:lnTo>
+                    <a:pt x="4655464" y="2629143"/>
+                  </a:lnTo>
+                  <a:lnTo>
+                    <a:pt x="4727086" y="2627592"/>
+                  </a:lnTo>
+                  <a:lnTo>
+                    <a:pt x="4798709" y="2626037"/>
+                  </a:lnTo>
+                  <a:lnTo>
+                    <a:pt x="4870331" y="2624480"/>
+                  </a:lnTo>
+                  <a:lnTo>
+                    <a:pt x="4941954" y="2622920"/>
+                  </a:lnTo>
+                  <a:lnTo>
+                    <a:pt x="5013576" y="2621357"/>
+                  </a:lnTo>
+                  <a:lnTo>
+                    <a:pt x="5085199" y="2619792"/>
+                  </a:lnTo>
+                  <a:lnTo>
+                    <a:pt x="5156821" y="2618223"/>
+                  </a:lnTo>
+                  <a:lnTo>
+                    <a:pt x="5228444" y="2616652"/>
+                  </a:lnTo>
+                  <a:lnTo>
+                    <a:pt x="5300066" y="2615078"/>
+                  </a:lnTo>
+                  <a:lnTo>
+                    <a:pt x="5371689" y="2613501"/>
+                  </a:lnTo>
+                  <a:lnTo>
+                    <a:pt x="5443311" y="2611921"/>
+                  </a:lnTo>
+                  <a:lnTo>
+                    <a:pt x="5514934" y="2610338"/>
+                  </a:lnTo>
+                  <a:lnTo>
+                    <a:pt x="5586557" y="2608752"/>
+                  </a:lnTo>
+                  <a:lnTo>
+                    <a:pt x="5658179" y="2607164"/>
+                  </a:lnTo>
+                  <a:lnTo>
+                    <a:pt x="5729802" y="2605572"/>
+                  </a:lnTo>
+                  <a:lnTo>
+                    <a:pt x="5801424" y="2603978"/>
+                  </a:lnTo>
+                  <a:lnTo>
+                    <a:pt x="5873047" y="2602381"/>
+                  </a:lnTo>
+                  <a:lnTo>
+                    <a:pt x="5944669" y="2600780"/>
+                  </a:lnTo>
+                  <a:lnTo>
+                    <a:pt x="6016292" y="2599177"/>
+                  </a:lnTo>
+                  <a:lnTo>
+                    <a:pt x="6087914" y="2597572"/>
+                  </a:lnTo>
+                  <a:lnTo>
+                    <a:pt x="6159537" y="2595963"/>
+                  </a:lnTo>
+                  <a:lnTo>
+                    <a:pt x="6231159" y="2594351"/>
+                  </a:lnTo>
+                  <a:lnTo>
+                    <a:pt x="6302782" y="2592736"/>
+                  </a:lnTo>
+                  <a:lnTo>
+                    <a:pt x="6374404" y="2591119"/>
+                  </a:lnTo>
+                  <a:lnTo>
+                    <a:pt x="6446027" y="2589498"/>
+                  </a:lnTo>
+                  <a:lnTo>
+                    <a:pt x="6517649" y="2587875"/>
+                  </a:lnTo>
+                  <a:lnTo>
+                    <a:pt x="6589272" y="2586248"/>
+                  </a:lnTo>
+                  <a:lnTo>
+                    <a:pt x="6660894" y="2584619"/>
+                  </a:lnTo>
+                  <a:lnTo>
+                    <a:pt x="6732517" y="2582986"/>
+                  </a:lnTo>
+                  <a:lnTo>
+                    <a:pt x="6804139" y="2581351"/>
+                  </a:lnTo>
+                  <a:lnTo>
+                    <a:pt x="6875762" y="2579713"/>
+                  </a:lnTo>
+                  <a:lnTo>
+                    <a:pt x="6947385" y="2578071"/>
+                  </a:lnTo>
+                  <a:lnTo>
+                    <a:pt x="7019007" y="2576427"/>
+                  </a:lnTo>
+                  <a:lnTo>
+                    <a:pt x="7090630" y="2574780"/>
+                  </a:lnTo>
+                  <a:lnTo>
+                    <a:pt x="7090630" y="3458791"/>
+                  </a:lnTo>
+                  <a:lnTo>
+                    <a:pt x="7019007" y="3456997"/>
+                  </a:lnTo>
+                  <a:lnTo>
+                    <a:pt x="6947385" y="3455074"/>
+                  </a:lnTo>
+                  <a:lnTo>
+                    <a:pt x="6875762" y="3453012"/>
+                  </a:lnTo>
+                  <a:lnTo>
+                    <a:pt x="6804139" y="3450802"/>
+                  </a:lnTo>
+                  <a:lnTo>
+                    <a:pt x="6732517" y="3448434"/>
+                  </a:lnTo>
+                  <a:lnTo>
+                    <a:pt x="6660894" y="3445895"/>
+                  </a:lnTo>
+                  <a:lnTo>
+                    <a:pt x="6589272" y="3443173"/>
+                  </a:lnTo>
+                  <a:lnTo>
+                    <a:pt x="6517649" y="3440256"/>
+                  </a:lnTo>
+                  <a:lnTo>
+                    <a:pt x="6446027" y="3437129"/>
+                  </a:lnTo>
+                  <a:lnTo>
+                    <a:pt x="6374404" y="3433777"/>
+                  </a:lnTo>
+                  <a:lnTo>
+                    <a:pt x="6302782" y="3430184"/>
+                  </a:lnTo>
+                  <a:lnTo>
+                    <a:pt x="6231159" y="3426333"/>
+                  </a:lnTo>
+                  <a:lnTo>
+                    <a:pt x="6159537" y="3422205"/>
+                  </a:lnTo>
+                  <a:lnTo>
+                    <a:pt x="6087914" y="3417780"/>
+                  </a:lnTo>
+                  <a:lnTo>
+                    <a:pt x="6016292" y="3413037"/>
+                  </a:lnTo>
+                  <a:lnTo>
+                    <a:pt x="5944669" y="3407953"/>
+                  </a:lnTo>
+                  <a:lnTo>
+                    <a:pt x="5873047" y="3402503"/>
+                  </a:lnTo>
+                  <a:lnTo>
+                    <a:pt x="5801424" y="3396662"/>
+                  </a:lnTo>
+                  <a:lnTo>
+                    <a:pt x="5729802" y="3390400"/>
+                  </a:lnTo>
+                  <a:lnTo>
+                    <a:pt x="5658179" y="3383689"/>
+                  </a:lnTo>
+                  <a:lnTo>
+                    <a:pt x="5586557" y="3376495"/>
+                  </a:lnTo>
+                  <a:lnTo>
+                    <a:pt x="5514934" y="3368783"/>
+                  </a:lnTo>
+                  <a:lnTo>
+                    <a:pt x="5443311" y="3360517"/>
+                  </a:lnTo>
+                  <a:lnTo>
+                    <a:pt x="5371689" y="3351657"/>
+                  </a:lnTo>
+                  <a:lnTo>
+                    <a:pt x="5300066" y="3342159"/>
+                  </a:lnTo>
+                  <a:lnTo>
+                    <a:pt x="5228444" y="3331979"/>
+                  </a:lnTo>
+                  <a:lnTo>
+                    <a:pt x="5156821" y="3321067"/>
+                  </a:lnTo>
+                  <a:lnTo>
+                    <a:pt x="5085199" y="3309370"/>
+                  </a:lnTo>
+                  <a:lnTo>
+                    <a:pt x="5013576" y="3296832"/>
+                  </a:lnTo>
+                  <a:lnTo>
+                    <a:pt x="4941954" y="3283393"/>
+                  </a:lnTo>
+                  <a:lnTo>
+                    <a:pt x="4870331" y="3268987"/>
+                  </a:lnTo>
+                  <a:lnTo>
+                    <a:pt x="4798709" y="3253546"/>
+                  </a:lnTo>
+                  <a:lnTo>
+                    <a:pt x="4727086" y="3236994"/>
+                  </a:lnTo>
+                  <a:lnTo>
+                    <a:pt x="4655464" y="3219253"/>
+                  </a:lnTo>
+                  <a:lnTo>
+                    <a:pt x="4583841" y="3200235"/>
+                  </a:lnTo>
+                  <a:lnTo>
+                    <a:pt x="4512219" y="3179851"/>
+                  </a:lnTo>
+                  <a:lnTo>
+                    <a:pt x="4440596" y="3158000"/>
+                  </a:lnTo>
+                  <a:lnTo>
+                    <a:pt x="4368974" y="3134579"/>
+                  </a:lnTo>
+                  <a:lnTo>
+                    <a:pt x="4297351" y="3109473"/>
+                  </a:lnTo>
+                  <a:lnTo>
+                    <a:pt x="4225729" y="3082563"/>
+                  </a:lnTo>
+                  <a:lnTo>
+                    <a:pt x="4154106" y="3053717"/>
+                  </a:lnTo>
+                  <a:lnTo>
+                    <a:pt x="4082483" y="3022798"/>
+                  </a:lnTo>
+                  <a:lnTo>
+                    <a:pt x="4010861" y="2989655"/>
+                  </a:lnTo>
+                  <a:lnTo>
+                    <a:pt x="3939238" y="2954129"/>
+                  </a:lnTo>
+                  <a:lnTo>
+                    <a:pt x="3867616" y="2916049"/>
+                  </a:lnTo>
+                  <a:lnTo>
+                    <a:pt x="3795993" y="2875231"/>
+                  </a:lnTo>
+                  <a:lnTo>
+                    <a:pt x="3724371" y="2831479"/>
+                  </a:lnTo>
+                  <a:lnTo>
+                    <a:pt x="3652748" y="2784580"/>
+                  </a:lnTo>
+                  <a:lnTo>
+                    <a:pt x="3581126" y="2734309"/>
+                  </a:lnTo>
+                  <a:lnTo>
+                    <a:pt x="3509503" y="2680424"/>
+                  </a:lnTo>
+                  <a:lnTo>
+                    <a:pt x="3437881" y="2655093"/>
+                  </a:lnTo>
+                  <a:lnTo>
+                    <a:pt x="3366258" y="2656595"/>
+                  </a:lnTo>
+                  <a:lnTo>
+                    <a:pt x="3294636" y="2658094"/>
+                  </a:lnTo>
+                  <a:lnTo>
+                    <a:pt x="3223013" y="2659590"/>
+                  </a:lnTo>
+                  <a:lnTo>
+                    <a:pt x="3151391" y="2661084"/>
+                  </a:lnTo>
+                  <a:lnTo>
+                    <a:pt x="3079768" y="2662574"/>
+                  </a:lnTo>
+                  <a:lnTo>
+                    <a:pt x="3008146" y="2664063"/>
+                  </a:lnTo>
+                  <a:lnTo>
+                    <a:pt x="2936523" y="2665548"/>
+                  </a:lnTo>
+                  <a:lnTo>
+                    <a:pt x="2864901" y="2667031"/>
+                  </a:lnTo>
+                  <a:lnTo>
+                    <a:pt x="2793278" y="2668511"/>
+                  </a:lnTo>
+                  <a:lnTo>
+                    <a:pt x="2721655" y="2669988"/>
+                  </a:lnTo>
+                  <a:lnTo>
+                    <a:pt x="2650033" y="2671463"/>
+                  </a:lnTo>
+                  <a:lnTo>
+                    <a:pt x="2578410" y="2672935"/>
+                  </a:lnTo>
+                  <a:lnTo>
+                    <a:pt x="2506788" y="2674404"/>
+                  </a:lnTo>
+                  <a:lnTo>
+                    <a:pt x="2435165" y="2675871"/>
+                  </a:lnTo>
+                  <a:lnTo>
+                    <a:pt x="2363543" y="2677335"/>
+                  </a:lnTo>
+                  <a:lnTo>
+                    <a:pt x="2291920" y="2678796"/>
+                  </a:lnTo>
+                  <a:lnTo>
+                    <a:pt x="2220298" y="2680255"/>
+                  </a:lnTo>
+                  <a:lnTo>
+                    <a:pt x="2148675" y="2681711"/>
+                  </a:lnTo>
+                  <a:lnTo>
+                    <a:pt x="2077053" y="2683165"/>
+                  </a:lnTo>
+                  <a:lnTo>
+                    <a:pt x="2005430" y="2684615"/>
+                  </a:lnTo>
+                  <a:lnTo>
+                    <a:pt x="1933808" y="2686064"/>
+                  </a:lnTo>
+                  <a:lnTo>
+                    <a:pt x="1862185" y="2687509"/>
+                  </a:lnTo>
+                  <a:lnTo>
+                    <a:pt x="1790563" y="2688952"/>
+                  </a:lnTo>
+                  <a:lnTo>
+                    <a:pt x="1718940" y="2690392"/>
+                  </a:lnTo>
+                  <a:lnTo>
+                    <a:pt x="1647318" y="2691830"/>
+                  </a:lnTo>
+                  <a:lnTo>
+                    <a:pt x="1575695" y="2693265"/>
+                  </a:lnTo>
+                  <a:lnTo>
+                    <a:pt x="1504073" y="2694698"/>
+                  </a:lnTo>
+                  <a:lnTo>
+                    <a:pt x="1432450" y="2696128"/>
+                  </a:lnTo>
+                  <a:lnTo>
+                    <a:pt x="1360827" y="2697555"/>
+                  </a:lnTo>
+                  <a:lnTo>
+                    <a:pt x="1289205" y="2698980"/>
+                  </a:lnTo>
+                  <a:lnTo>
+                    <a:pt x="1217582" y="2700402"/>
+                  </a:lnTo>
+                  <a:lnTo>
+                    <a:pt x="1145960" y="2701822"/>
+                  </a:lnTo>
+                  <a:lnTo>
+                    <a:pt x="1074337" y="2703239"/>
+                  </a:lnTo>
+                  <a:lnTo>
+                    <a:pt x="1002715" y="2704653"/>
+                  </a:lnTo>
+                  <a:lnTo>
+                    <a:pt x="931092" y="2706065"/>
+                  </a:lnTo>
+                  <a:lnTo>
+                    <a:pt x="859470" y="2707474"/>
+                  </a:lnTo>
+                  <a:lnTo>
+                    <a:pt x="787847" y="2708881"/>
+                  </a:lnTo>
+                  <a:lnTo>
+                    <a:pt x="716225" y="2710285"/>
+                  </a:lnTo>
+                  <a:lnTo>
+                    <a:pt x="644602" y="2711687"/>
+                  </a:lnTo>
+                  <a:lnTo>
+                    <a:pt x="572980" y="2713086"/>
+                  </a:lnTo>
+                  <a:lnTo>
+                    <a:pt x="501357" y="2714483"/>
+                  </a:lnTo>
+                  <a:lnTo>
+                    <a:pt x="429735" y="2715877"/>
+                  </a:lnTo>
+                  <a:lnTo>
+                    <a:pt x="358112" y="2717268"/>
+                  </a:lnTo>
+                  <a:lnTo>
+                    <a:pt x="286490" y="2718657"/>
+                  </a:lnTo>
+                  <a:lnTo>
+                    <a:pt x="214867" y="2720044"/>
+                  </a:lnTo>
+                  <a:lnTo>
+                    <a:pt x="143245" y="2721428"/>
+                  </a:lnTo>
+                  <a:lnTo>
+                    <a:pt x="71622" y="2722809"/>
+                  </a:lnTo>
+                  <a:lnTo>
+                    <a:pt x="0" y="2724188"/>
                   </a:lnTo>
                   <a:close/>
                 </a:path>
@@ -3595,231 +3595,231 @@
           </p:nvSpPr>
           <p:spPr>
             <a:xfrm>
-              <a:off x="3171081" y="2073503"/>
-              <a:ext cx="5091597" cy="2662112"/>
+              <a:off x="3168474" y="2073503"/>
+              <a:ext cx="5094205" cy="2653589"/>
             </a:xfrm>
             <a:custGeom>
               <a:avLst/>
               <a:pathLst>
-                <a:path w="5091597" h="2662112">
+                <a:path w="5094205" h="2653589">
                   <a:moveTo>
                     <a:pt x="0" y="0"/>
                   </a:moveTo>
                   <a:lnTo>
-                    <a:pt x="6398" y="22522"/>
-                  </a:lnTo>
-                  <a:lnTo>
-                    <a:pt x="78021" y="257516"/>
-                  </a:lnTo>
-                  <a:lnTo>
-                    <a:pt x="149643" y="476555"/>
-                  </a:lnTo>
-                  <a:lnTo>
-                    <a:pt x="221266" y="680723"/>
-                  </a:lnTo>
-                  <a:lnTo>
-                    <a:pt x="292888" y="871030"/>
-                  </a:lnTo>
-                  <a:lnTo>
-                    <a:pt x="364511" y="1048416"/>
-                  </a:lnTo>
-                  <a:lnTo>
-                    <a:pt x="436133" y="1213758"/>
-                  </a:lnTo>
-                  <a:lnTo>
-                    <a:pt x="507756" y="1367875"/>
-                  </a:lnTo>
-                  <a:lnTo>
-                    <a:pt x="579378" y="1511529"/>
-                  </a:lnTo>
-                  <a:lnTo>
-                    <a:pt x="651001" y="1645429"/>
-                  </a:lnTo>
-                  <a:lnTo>
-                    <a:pt x="722623" y="1770239"/>
-                  </a:lnTo>
-                  <a:lnTo>
-                    <a:pt x="794246" y="1886574"/>
-                  </a:lnTo>
-                  <a:lnTo>
-                    <a:pt x="865868" y="1995011"/>
-                  </a:lnTo>
-                  <a:lnTo>
-                    <a:pt x="937491" y="2096087"/>
-                  </a:lnTo>
-                  <a:lnTo>
-                    <a:pt x="1009113" y="2190299"/>
-                  </a:lnTo>
-                  <a:lnTo>
-                    <a:pt x="1080736" y="2278116"/>
-                  </a:lnTo>
-                  <a:lnTo>
-                    <a:pt x="1152358" y="2359970"/>
-                  </a:lnTo>
-                  <a:lnTo>
-                    <a:pt x="1223981" y="2436267"/>
-                  </a:lnTo>
-                  <a:lnTo>
-                    <a:pt x="1295603" y="2507384"/>
-                  </a:lnTo>
-                  <a:lnTo>
-                    <a:pt x="1367226" y="2573672"/>
-                  </a:lnTo>
-                  <a:lnTo>
-                    <a:pt x="1438849" y="2635460"/>
-                  </a:lnTo>
-                  <a:lnTo>
-                    <a:pt x="1510471" y="2654389"/>
-                  </a:lnTo>
-                  <a:lnTo>
-                    <a:pt x="1582094" y="2654544"/>
-                  </a:lnTo>
-                  <a:lnTo>
-                    <a:pt x="1653716" y="2654699"/>
-                  </a:lnTo>
-                  <a:lnTo>
-                    <a:pt x="1725339" y="2654854"/>
-                  </a:lnTo>
-                  <a:lnTo>
-                    <a:pt x="1796961" y="2655009"/>
-                  </a:lnTo>
-                  <a:lnTo>
-                    <a:pt x="1868584" y="2655164"/>
-                  </a:lnTo>
-                  <a:lnTo>
-                    <a:pt x="1940206" y="2655319"/>
-                  </a:lnTo>
-                  <a:lnTo>
-                    <a:pt x="2011829" y="2655474"/>
-                  </a:lnTo>
-                  <a:lnTo>
-                    <a:pt x="2083451" y="2655629"/>
-                  </a:lnTo>
-                  <a:lnTo>
-                    <a:pt x="2155074" y="2655784"/>
-                  </a:lnTo>
-                  <a:lnTo>
-                    <a:pt x="2226696" y="2655939"/>
-                  </a:lnTo>
-                  <a:lnTo>
-                    <a:pt x="2298319" y="2656094"/>
-                  </a:lnTo>
-                  <a:lnTo>
-                    <a:pt x="2369941" y="2656249"/>
-                  </a:lnTo>
-                  <a:lnTo>
-                    <a:pt x="2441564" y="2656404"/>
-                  </a:lnTo>
-                  <a:lnTo>
-                    <a:pt x="2513186" y="2656558"/>
-                  </a:lnTo>
-                  <a:lnTo>
-                    <a:pt x="2584809" y="2656713"/>
-                  </a:lnTo>
-                  <a:lnTo>
-                    <a:pt x="2656431" y="2656868"/>
-                  </a:lnTo>
-                  <a:lnTo>
-                    <a:pt x="2728054" y="2657023"/>
-                  </a:lnTo>
-                  <a:lnTo>
-                    <a:pt x="2799677" y="2657177"/>
-                  </a:lnTo>
-                  <a:lnTo>
-                    <a:pt x="2871299" y="2657332"/>
-                  </a:lnTo>
-                  <a:lnTo>
-                    <a:pt x="2942922" y="2657486"/>
-                  </a:lnTo>
-                  <a:lnTo>
-                    <a:pt x="3014544" y="2657641"/>
-                  </a:lnTo>
-                  <a:lnTo>
-                    <a:pt x="3086167" y="2657796"/>
-                  </a:lnTo>
-                  <a:lnTo>
-                    <a:pt x="3157789" y="2657950"/>
-                  </a:lnTo>
-                  <a:lnTo>
-                    <a:pt x="3229412" y="2658105"/>
-                  </a:lnTo>
-                  <a:lnTo>
-                    <a:pt x="3301034" y="2658259"/>
-                  </a:lnTo>
-                  <a:lnTo>
-                    <a:pt x="3372657" y="2658414"/>
-                  </a:lnTo>
-                  <a:lnTo>
-                    <a:pt x="3444279" y="2658568"/>
-                  </a:lnTo>
-                  <a:lnTo>
-                    <a:pt x="3515902" y="2658722"/>
-                  </a:lnTo>
-                  <a:lnTo>
-                    <a:pt x="3587524" y="2658877"/>
-                  </a:lnTo>
-                  <a:lnTo>
-                    <a:pt x="3659147" y="2659031"/>
-                  </a:lnTo>
-                  <a:lnTo>
-                    <a:pt x="3730769" y="2659185"/>
-                  </a:lnTo>
-                  <a:lnTo>
-                    <a:pt x="3802392" y="2659340"/>
-                  </a:lnTo>
-                  <a:lnTo>
-                    <a:pt x="3874014" y="2659494"/>
-                  </a:lnTo>
-                  <a:lnTo>
-                    <a:pt x="3945637" y="2659648"/>
-                  </a:lnTo>
-                  <a:lnTo>
-                    <a:pt x="4017259" y="2659802"/>
-                  </a:lnTo>
-                  <a:lnTo>
-                    <a:pt x="4088882" y="2659957"/>
-                  </a:lnTo>
-                  <a:lnTo>
-                    <a:pt x="4160505" y="2660111"/>
-                  </a:lnTo>
-                  <a:lnTo>
-                    <a:pt x="4232127" y="2660265"/>
-                  </a:lnTo>
-                  <a:lnTo>
-                    <a:pt x="4303750" y="2660419"/>
-                  </a:lnTo>
-                  <a:lnTo>
-                    <a:pt x="4375372" y="2660573"/>
-                  </a:lnTo>
-                  <a:lnTo>
-                    <a:pt x="4446995" y="2660727"/>
-                  </a:lnTo>
-                  <a:lnTo>
-                    <a:pt x="4518617" y="2660881"/>
-                  </a:lnTo>
-                  <a:lnTo>
-                    <a:pt x="4590240" y="2661035"/>
-                  </a:lnTo>
-                  <a:lnTo>
-                    <a:pt x="4661862" y="2661189"/>
-                  </a:lnTo>
-                  <a:lnTo>
-                    <a:pt x="4733485" y="2661343"/>
-                  </a:lnTo>
-                  <a:lnTo>
-                    <a:pt x="4805107" y="2661497"/>
-                  </a:lnTo>
-                  <a:lnTo>
-                    <a:pt x="4876730" y="2661650"/>
-                  </a:lnTo>
-                  <a:lnTo>
-                    <a:pt x="4948352" y="2661804"/>
-                  </a:lnTo>
-                  <a:lnTo>
-                    <a:pt x="5019975" y="2661958"/>
-                  </a:lnTo>
-                  <a:lnTo>
-                    <a:pt x="5091597" y="2662112"/>
+                    <a:pt x="9006" y="31214"/>
+                  </a:lnTo>
+                  <a:lnTo>
+                    <a:pt x="80628" y="262803"/>
+                  </a:lnTo>
+                  <a:lnTo>
+                    <a:pt x="152251" y="478857"/>
+                  </a:lnTo>
+                  <a:lnTo>
+                    <a:pt x="223873" y="680419"/>
+                  </a:lnTo>
+                  <a:lnTo>
+                    <a:pt x="295496" y="868461"/>
+                  </a:lnTo>
+                  <a:lnTo>
+                    <a:pt x="367118" y="1043889"/>
+                  </a:lnTo>
+                  <a:lnTo>
+                    <a:pt x="438741" y="1207550"/>
+                  </a:lnTo>
+                  <a:lnTo>
+                    <a:pt x="510363" y="1360232"/>
+                  </a:lnTo>
+                  <a:lnTo>
+                    <a:pt x="581986" y="1502673"/>
+                  </a:lnTo>
+                  <a:lnTo>
+                    <a:pt x="653608" y="1635560"/>
+                  </a:lnTo>
+                  <a:lnTo>
+                    <a:pt x="725231" y="1759532"/>
+                  </a:lnTo>
+                  <a:lnTo>
+                    <a:pt x="796853" y="1875189"/>
+                  </a:lnTo>
+                  <a:lnTo>
+                    <a:pt x="868476" y="1983088"/>
+                  </a:lnTo>
+                  <a:lnTo>
+                    <a:pt x="940098" y="2083749"/>
+                  </a:lnTo>
+                  <a:lnTo>
+                    <a:pt x="1011721" y="2177658"/>
+                  </a:lnTo>
+                  <a:lnTo>
+                    <a:pt x="1083343" y="2265268"/>
+                  </a:lnTo>
+                  <a:lnTo>
+                    <a:pt x="1154966" y="2347001"/>
+                  </a:lnTo>
+                  <a:lnTo>
+                    <a:pt x="1226588" y="2423251"/>
+                  </a:lnTo>
+                  <a:lnTo>
+                    <a:pt x="1298211" y="2494387"/>
+                  </a:lnTo>
+                  <a:lnTo>
+                    <a:pt x="1369834" y="2560752"/>
+                  </a:lnTo>
+                  <a:lnTo>
+                    <a:pt x="1441456" y="2622664"/>
+                  </a:lnTo>
+                  <a:lnTo>
+                    <a:pt x="1513079" y="2653589"/>
+                  </a:lnTo>
+                  <a:lnTo>
+                    <a:pt x="1584701" y="2652082"/>
+                  </a:lnTo>
+                  <a:lnTo>
+                    <a:pt x="1656324" y="2650572"/>
+                  </a:lnTo>
+                  <a:lnTo>
+                    <a:pt x="1727946" y="2649059"/>
+                  </a:lnTo>
+                  <a:lnTo>
+                    <a:pt x="1799569" y="2647544"/>
+                  </a:lnTo>
+                  <a:lnTo>
+                    <a:pt x="1871191" y="2646026"/>
+                  </a:lnTo>
+                  <a:lnTo>
+                    <a:pt x="1942814" y="2644505"/>
+                  </a:lnTo>
+                  <a:lnTo>
+                    <a:pt x="2014436" y="2642981"/>
+                  </a:lnTo>
+                  <a:lnTo>
+                    <a:pt x="2086059" y="2641455"/>
+                  </a:lnTo>
+                  <a:lnTo>
+                    <a:pt x="2157681" y="2639925"/>
+                  </a:lnTo>
+                  <a:lnTo>
+                    <a:pt x="2229304" y="2638393"/>
+                  </a:lnTo>
+                  <a:lnTo>
+                    <a:pt x="2300926" y="2636859"/>
+                  </a:lnTo>
+                  <a:lnTo>
+                    <a:pt x="2372549" y="2635321"/>
+                  </a:lnTo>
+                  <a:lnTo>
+                    <a:pt x="2444171" y="2633781"/>
+                  </a:lnTo>
+                  <a:lnTo>
+                    <a:pt x="2515794" y="2632238"/>
+                  </a:lnTo>
+                  <a:lnTo>
+                    <a:pt x="2587416" y="2630692"/>
+                  </a:lnTo>
+                  <a:lnTo>
+                    <a:pt x="2659039" y="2629143"/>
+                  </a:lnTo>
+                  <a:lnTo>
+                    <a:pt x="2730662" y="2627592"/>
+                  </a:lnTo>
+                  <a:lnTo>
+                    <a:pt x="2802284" y="2626037"/>
+                  </a:lnTo>
+                  <a:lnTo>
+                    <a:pt x="2873907" y="2624480"/>
+                  </a:lnTo>
+                  <a:lnTo>
+                    <a:pt x="2945529" y="2622920"/>
+                  </a:lnTo>
+                  <a:lnTo>
+                    <a:pt x="3017152" y="2621357"/>
+                  </a:lnTo>
+                  <a:lnTo>
+                    <a:pt x="3088774" y="2619792"/>
+                  </a:lnTo>
+                  <a:lnTo>
+                    <a:pt x="3160397" y="2618223"/>
+                  </a:lnTo>
+                  <a:lnTo>
+                    <a:pt x="3232019" y="2616652"/>
+                  </a:lnTo>
+                  <a:lnTo>
+                    <a:pt x="3303642" y="2615078"/>
+                  </a:lnTo>
+                  <a:lnTo>
+                    <a:pt x="3375264" y="2613501"/>
+                  </a:lnTo>
+                  <a:lnTo>
+                    <a:pt x="3446887" y="2611921"/>
+                  </a:lnTo>
+                  <a:lnTo>
+                    <a:pt x="3518509" y="2610338"/>
+                  </a:lnTo>
+                  <a:lnTo>
+                    <a:pt x="3590132" y="2608752"/>
+                  </a:lnTo>
+                  <a:lnTo>
+                    <a:pt x="3661754" y="2607164"/>
+                  </a:lnTo>
+                  <a:lnTo>
+                    <a:pt x="3733377" y="2605572"/>
+                  </a:lnTo>
+                  <a:lnTo>
+                    <a:pt x="3804999" y="2603978"/>
+                  </a:lnTo>
+                  <a:lnTo>
+                    <a:pt x="3876622" y="2602381"/>
+                  </a:lnTo>
+                  <a:lnTo>
+                    <a:pt x="3948244" y="2600780"/>
+                  </a:lnTo>
+                  <a:lnTo>
+                    <a:pt x="4019867" y="2599177"/>
+                  </a:lnTo>
+                  <a:lnTo>
+                    <a:pt x="4091490" y="2597572"/>
+                  </a:lnTo>
+                  <a:lnTo>
+                    <a:pt x="4163112" y="2595963"/>
+                  </a:lnTo>
+                  <a:lnTo>
+                    <a:pt x="4234735" y="2594351"/>
+                  </a:lnTo>
+                  <a:lnTo>
+                    <a:pt x="4306357" y="2592736"/>
+                  </a:lnTo>
+                  <a:lnTo>
+                    <a:pt x="4377980" y="2591119"/>
+                  </a:lnTo>
+                  <a:lnTo>
+                    <a:pt x="4449602" y="2589498"/>
+                  </a:lnTo>
+                  <a:lnTo>
+                    <a:pt x="4521225" y="2587875"/>
+                  </a:lnTo>
+                  <a:lnTo>
+                    <a:pt x="4592847" y="2586248"/>
+                  </a:lnTo>
+                  <a:lnTo>
+                    <a:pt x="4664470" y="2584619"/>
+                  </a:lnTo>
+                  <a:lnTo>
+                    <a:pt x="4736092" y="2582986"/>
+                  </a:lnTo>
+                  <a:lnTo>
+                    <a:pt x="4807715" y="2581351"/>
+                  </a:lnTo>
+                  <a:lnTo>
+                    <a:pt x="4879337" y="2579713"/>
+                  </a:lnTo>
+                  <a:lnTo>
+                    <a:pt x="4950960" y="2578071"/>
+                  </a:lnTo>
+                  <a:lnTo>
+                    <a:pt x="5022582" y="2576427"/>
+                  </a:lnTo>
+                  <a:lnTo>
+                    <a:pt x="5094205" y="2574780"/>
                   </a:lnTo>
                 </a:path>
               </a:pathLst>
@@ -3839,312 +3839,312 @@
           </p:nvSpPr>
           <p:spPr>
             <a:xfrm>
-              <a:off x="1172049" y="4720252"/>
-              <a:ext cx="7090630" cy="813485"/>
+              <a:off x="1172049" y="4728596"/>
+              <a:ext cx="7090630" cy="803698"/>
             </a:xfrm>
             <a:custGeom>
               <a:avLst/>
               <a:pathLst>
-                <a:path w="7090630" h="813485">
+                <a:path w="7090630" h="803698">
                   <a:moveTo>
-                    <a:pt x="7090630" y="813485"/>
+                    <a:pt x="7090630" y="803698"/>
                   </a:moveTo>
                   <a:lnTo>
-                    <a:pt x="7019007" y="811772"/>
-                  </a:lnTo>
-                  <a:lnTo>
-                    <a:pt x="6947385" y="809935"/>
-                  </a:lnTo>
-                  <a:lnTo>
-                    <a:pt x="6875762" y="807963"/>
-                  </a:lnTo>
-                  <a:lnTo>
-                    <a:pt x="6804139" y="805849"/>
-                  </a:lnTo>
-                  <a:lnTo>
-                    <a:pt x="6732517" y="803580"/>
-                  </a:lnTo>
-                  <a:lnTo>
-                    <a:pt x="6660894" y="801146"/>
-                  </a:lnTo>
-                  <a:lnTo>
-                    <a:pt x="6589272" y="798535"/>
-                  </a:lnTo>
-                  <a:lnTo>
-                    <a:pt x="6517649" y="795733"/>
-                  </a:lnTo>
-                  <a:lnTo>
-                    <a:pt x="6446027" y="792728"/>
-                  </a:lnTo>
-                  <a:lnTo>
-                    <a:pt x="6374404" y="789503"/>
-                  </a:lnTo>
-                  <a:lnTo>
-                    <a:pt x="6302782" y="786044"/>
-                  </a:lnTo>
-                  <a:lnTo>
-                    <a:pt x="6231159" y="782332"/>
-                  </a:lnTo>
-                  <a:lnTo>
-                    <a:pt x="6159537" y="778351"/>
-                  </a:lnTo>
-                  <a:lnTo>
-                    <a:pt x="6087914" y="774079"/>
-                  </a:lnTo>
-                  <a:lnTo>
-                    <a:pt x="6016292" y="769496"/>
-                  </a:lnTo>
-                  <a:lnTo>
-                    <a:pt x="5944669" y="764580"/>
-                  </a:lnTo>
-                  <a:lnTo>
-                    <a:pt x="5873047" y="759305"/>
-                  </a:lnTo>
-                  <a:lnTo>
-                    <a:pt x="5801424" y="753646"/>
-                  </a:lnTo>
-                  <a:lnTo>
-                    <a:pt x="5729802" y="747575"/>
-                  </a:lnTo>
-                  <a:lnTo>
-                    <a:pt x="5658179" y="741062"/>
-                  </a:lnTo>
-                  <a:lnTo>
-                    <a:pt x="5586557" y="734074"/>
-                  </a:lnTo>
-                  <a:lnTo>
-                    <a:pt x="5514934" y="726577"/>
-                  </a:lnTo>
-                  <a:lnTo>
-                    <a:pt x="5443311" y="718534"/>
-                  </a:lnTo>
-                  <a:lnTo>
-                    <a:pt x="5371689" y="709906"/>
-                  </a:lnTo>
-                  <a:lnTo>
-                    <a:pt x="5300066" y="700648"/>
-                  </a:lnTo>
-                  <a:lnTo>
-                    <a:pt x="5228444" y="690717"/>
-                  </a:lnTo>
-                  <a:lnTo>
-                    <a:pt x="5156821" y="680062"/>
-                  </a:lnTo>
-                  <a:lnTo>
-                    <a:pt x="5085199" y="668631"/>
-                  </a:lnTo>
-                  <a:lnTo>
-                    <a:pt x="5013576" y="656368"/>
-                  </a:lnTo>
-                  <a:lnTo>
-                    <a:pt x="4941954" y="643211"/>
-                  </a:lnTo>
-                  <a:lnTo>
-                    <a:pt x="4870331" y="629096"/>
-                  </a:lnTo>
-                  <a:lnTo>
-                    <a:pt x="4798709" y="613953"/>
-                  </a:lnTo>
-                  <a:lnTo>
-                    <a:pt x="4727086" y="597707"/>
-                  </a:lnTo>
-                  <a:lnTo>
-                    <a:pt x="4655464" y="580277"/>
-                  </a:lnTo>
-                  <a:lnTo>
-                    <a:pt x="4583841" y="561578"/>
-                  </a:lnTo>
-                  <a:lnTo>
-                    <a:pt x="4512219" y="541517"/>
-                  </a:lnTo>
-                  <a:lnTo>
-                    <a:pt x="4440596" y="519995"/>
-                  </a:lnTo>
-                  <a:lnTo>
-                    <a:pt x="4368974" y="496905"/>
-                  </a:lnTo>
-                  <a:lnTo>
-                    <a:pt x="4297351" y="472133"/>
-                  </a:lnTo>
-                  <a:lnTo>
-                    <a:pt x="4225729" y="445557"/>
-                  </a:lnTo>
-                  <a:lnTo>
-                    <a:pt x="4154106" y="417045"/>
-                  </a:lnTo>
-                  <a:lnTo>
-                    <a:pt x="4082483" y="386457"/>
-                  </a:lnTo>
-                  <a:lnTo>
-                    <a:pt x="4010861" y="353640"/>
-                  </a:lnTo>
-                  <a:lnTo>
-                    <a:pt x="3939238" y="318433"/>
-                  </a:lnTo>
-                  <a:lnTo>
-                    <a:pt x="3867616" y="280662"/>
-                  </a:lnTo>
-                  <a:lnTo>
-                    <a:pt x="3795993" y="240139"/>
-                  </a:lnTo>
-                  <a:lnTo>
-                    <a:pt x="3724371" y="196665"/>
-                  </a:lnTo>
-                  <a:lnTo>
-                    <a:pt x="3652748" y="150024"/>
-                  </a:lnTo>
-                  <a:lnTo>
-                    <a:pt x="3581126" y="99986"/>
-                  </a:lnTo>
-                  <a:lnTo>
-                    <a:pt x="3509503" y="46303"/>
-                  </a:lnTo>
-                  <a:lnTo>
-                    <a:pt x="3437881" y="7483"/>
-                  </a:lnTo>
-                  <a:lnTo>
-                    <a:pt x="3366258" y="7328"/>
-                  </a:lnTo>
-                  <a:lnTo>
-                    <a:pt x="3294636" y="7173"/>
-                  </a:lnTo>
-                  <a:lnTo>
-                    <a:pt x="3223013" y="7018"/>
-                  </a:lnTo>
-                  <a:lnTo>
-                    <a:pt x="3151391" y="6862"/>
-                  </a:lnTo>
-                  <a:lnTo>
-                    <a:pt x="3079768" y="6707"/>
-                  </a:lnTo>
-                  <a:lnTo>
-                    <a:pt x="3008146" y="6552"/>
-                  </a:lnTo>
-                  <a:lnTo>
-                    <a:pt x="2936523" y="6396"/>
-                  </a:lnTo>
-                  <a:lnTo>
-                    <a:pt x="2864901" y="6241"/>
-                  </a:lnTo>
-                  <a:lnTo>
-                    <a:pt x="2793278" y="6085"/>
-                  </a:lnTo>
-                  <a:lnTo>
-                    <a:pt x="2721655" y="5930"/>
-                  </a:lnTo>
-                  <a:lnTo>
-                    <a:pt x="2650033" y="5774"/>
-                  </a:lnTo>
-                  <a:lnTo>
-                    <a:pt x="2578410" y="5619"/>
-                  </a:lnTo>
-                  <a:lnTo>
-                    <a:pt x="2506788" y="5463"/>
-                  </a:lnTo>
-                  <a:lnTo>
-                    <a:pt x="2435165" y="5308"/>
-                  </a:lnTo>
-                  <a:lnTo>
-                    <a:pt x="2363543" y="5152"/>
-                  </a:lnTo>
-                  <a:lnTo>
-                    <a:pt x="2291920" y="4996"/>
-                  </a:lnTo>
-                  <a:lnTo>
-                    <a:pt x="2220298" y="4841"/>
-                  </a:lnTo>
-                  <a:lnTo>
-                    <a:pt x="2148675" y="4685"/>
-                  </a:lnTo>
-                  <a:lnTo>
-                    <a:pt x="2077053" y="4529"/>
-                  </a:lnTo>
-                  <a:lnTo>
-                    <a:pt x="2005430" y="4373"/>
-                  </a:lnTo>
-                  <a:lnTo>
-                    <a:pt x="1933808" y="4218"/>
-                  </a:lnTo>
-                  <a:lnTo>
-                    <a:pt x="1862185" y="4062"/>
-                  </a:lnTo>
-                  <a:lnTo>
-                    <a:pt x="1790563" y="3906"/>
-                  </a:lnTo>
-                  <a:lnTo>
-                    <a:pt x="1718940" y="3750"/>
-                  </a:lnTo>
-                  <a:lnTo>
-                    <a:pt x="1647318" y="3594"/>
-                  </a:lnTo>
-                  <a:lnTo>
-                    <a:pt x="1575695" y="3438"/>
-                  </a:lnTo>
-                  <a:lnTo>
-                    <a:pt x="1504073" y="3282"/>
-                  </a:lnTo>
-                  <a:lnTo>
-                    <a:pt x="1432450" y="3126"/>
-                  </a:lnTo>
-                  <a:lnTo>
-                    <a:pt x="1360827" y="2970"/>
-                  </a:lnTo>
-                  <a:lnTo>
-                    <a:pt x="1289205" y="2814"/>
-                  </a:lnTo>
-                  <a:lnTo>
-                    <a:pt x="1217582" y="2658"/>
-                  </a:lnTo>
-                  <a:lnTo>
-                    <a:pt x="1145960" y="2502"/>
-                  </a:lnTo>
-                  <a:lnTo>
-                    <a:pt x="1074337" y="2345"/>
-                  </a:lnTo>
-                  <a:lnTo>
-                    <a:pt x="1002715" y="2189"/>
-                  </a:lnTo>
-                  <a:lnTo>
-                    <a:pt x="931092" y="2033"/>
-                  </a:lnTo>
-                  <a:lnTo>
-                    <a:pt x="859470" y="1877"/>
-                  </a:lnTo>
-                  <a:lnTo>
-                    <a:pt x="787847" y="1721"/>
-                  </a:lnTo>
-                  <a:lnTo>
-                    <a:pt x="716225" y="1564"/>
-                  </a:lnTo>
-                  <a:lnTo>
-                    <a:pt x="644602" y="1408"/>
-                  </a:lnTo>
-                  <a:lnTo>
-                    <a:pt x="572980" y="1252"/>
-                  </a:lnTo>
-                  <a:lnTo>
-                    <a:pt x="501357" y="1095"/>
-                  </a:lnTo>
-                  <a:lnTo>
-                    <a:pt x="429735" y="939"/>
-                  </a:lnTo>
-                  <a:lnTo>
-                    <a:pt x="358112" y="782"/>
-                  </a:lnTo>
-                  <a:lnTo>
-                    <a:pt x="286490" y="626"/>
-                  </a:lnTo>
-                  <a:lnTo>
-                    <a:pt x="214867" y="469"/>
-                  </a:lnTo>
-                  <a:lnTo>
-                    <a:pt x="143245" y="313"/>
-                  </a:lnTo>
-                  <a:lnTo>
-                    <a:pt x="71622" y="156"/>
-                  </a:lnTo>
-                  <a:lnTo>
-                    <a:pt x="0" y="0"/>
+                    <a:pt x="7019007" y="801904"/>
+                  </a:lnTo>
+                  <a:lnTo>
+                    <a:pt x="6947385" y="799980"/>
+                  </a:lnTo>
+                  <a:lnTo>
+                    <a:pt x="6875762" y="797919"/>
+                  </a:lnTo>
+                  <a:lnTo>
+                    <a:pt x="6804139" y="795709"/>
+                  </a:lnTo>
+                  <a:lnTo>
+                    <a:pt x="6732517" y="793340"/>
+                  </a:lnTo>
+                  <a:lnTo>
+                    <a:pt x="6660894" y="790801"/>
+                  </a:lnTo>
+                  <a:lnTo>
+                    <a:pt x="6589272" y="788080"/>
+                  </a:lnTo>
+                  <a:lnTo>
+                    <a:pt x="6517649" y="785162"/>
+                  </a:lnTo>
+                  <a:lnTo>
+                    <a:pt x="6446027" y="782035"/>
+                  </a:lnTo>
+                  <a:lnTo>
+                    <a:pt x="6374404" y="778683"/>
+                  </a:lnTo>
+                  <a:lnTo>
+                    <a:pt x="6302782" y="775091"/>
+                  </a:lnTo>
+                  <a:lnTo>
+                    <a:pt x="6231159" y="771239"/>
+                  </a:lnTo>
+                  <a:lnTo>
+                    <a:pt x="6159537" y="767111"/>
+                  </a:lnTo>
+                  <a:lnTo>
+                    <a:pt x="6087914" y="762686"/>
+                  </a:lnTo>
+                  <a:lnTo>
+                    <a:pt x="6016292" y="757943"/>
+                  </a:lnTo>
+                  <a:lnTo>
+                    <a:pt x="5944669" y="752859"/>
+                  </a:lnTo>
+                  <a:lnTo>
+                    <a:pt x="5873047" y="747410"/>
+                  </a:lnTo>
+                  <a:lnTo>
+                    <a:pt x="5801424" y="741568"/>
+                  </a:lnTo>
+                  <a:lnTo>
+                    <a:pt x="5729802" y="735307"/>
+                  </a:lnTo>
+                  <a:lnTo>
+                    <a:pt x="5658179" y="728595"/>
+                  </a:lnTo>
+                  <a:lnTo>
+                    <a:pt x="5586557" y="721401"/>
+                  </a:lnTo>
+                  <a:lnTo>
+                    <a:pt x="5514934" y="713689"/>
+                  </a:lnTo>
+                  <a:lnTo>
+                    <a:pt x="5443311" y="705423"/>
+                  </a:lnTo>
+                  <a:lnTo>
+                    <a:pt x="5371689" y="696563"/>
+                  </a:lnTo>
+                  <a:lnTo>
+                    <a:pt x="5300066" y="687066"/>
+                  </a:lnTo>
+                  <a:lnTo>
+                    <a:pt x="5228444" y="676886"/>
+                  </a:lnTo>
+                  <a:lnTo>
+                    <a:pt x="5156821" y="665973"/>
+                  </a:lnTo>
+                  <a:lnTo>
+                    <a:pt x="5085199" y="654276"/>
+                  </a:lnTo>
+                  <a:lnTo>
+                    <a:pt x="5013576" y="641739"/>
+                  </a:lnTo>
+                  <a:lnTo>
+                    <a:pt x="4941954" y="628299"/>
+                  </a:lnTo>
+                  <a:lnTo>
+                    <a:pt x="4870331" y="613894"/>
+                  </a:lnTo>
+                  <a:lnTo>
+                    <a:pt x="4798709" y="598452"/>
+                  </a:lnTo>
+                  <a:lnTo>
+                    <a:pt x="4727086" y="581901"/>
+                  </a:lnTo>
+                  <a:lnTo>
+                    <a:pt x="4655464" y="564159"/>
+                  </a:lnTo>
+                  <a:lnTo>
+                    <a:pt x="4583841" y="545142"/>
+                  </a:lnTo>
+                  <a:lnTo>
+                    <a:pt x="4512219" y="524757"/>
+                  </a:lnTo>
+                  <a:lnTo>
+                    <a:pt x="4440596" y="502907"/>
+                  </a:lnTo>
+                  <a:lnTo>
+                    <a:pt x="4368974" y="479485"/>
+                  </a:lnTo>
+                  <a:lnTo>
+                    <a:pt x="4297351" y="454380"/>
+                  </a:lnTo>
+                  <a:lnTo>
+                    <a:pt x="4225729" y="427469"/>
+                  </a:lnTo>
+                  <a:lnTo>
+                    <a:pt x="4154106" y="398624"/>
+                  </a:lnTo>
+                  <a:lnTo>
+                    <a:pt x="4082483" y="367704"/>
+                  </a:lnTo>
+                  <a:lnTo>
+                    <a:pt x="4010861" y="334561"/>
+                  </a:lnTo>
+                  <a:lnTo>
+                    <a:pt x="3939238" y="299036"/>
+                  </a:lnTo>
+                  <a:lnTo>
+                    <a:pt x="3867616" y="260956"/>
+                  </a:lnTo>
+                  <a:lnTo>
+                    <a:pt x="3795993" y="220138"/>
+                  </a:lnTo>
+                  <a:lnTo>
+                    <a:pt x="3724371" y="176385"/>
+                  </a:lnTo>
+                  <a:lnTo>
+                    <a:pt x="3652748" y="129486"/>
+                  </a:lnTo>
+                  <a:lnTo>
+                    <a:pt x="3581126" y="79216"/>
+                  </a:lnTo>
+                  <a:lnTo>
+                    <a:pt x="3509503" y="25330"/>
+                  </a:lnTo>
+                  <a:lnTo>
+                    <a:pt x="3437881" y="0"/>
+                  </a:lnTo>
+                  <a:lnTo>
+                    <a:pt x="3366258" y="1501"/>
+                  </a:lnTo>
+                  <a:lnTo>
+                    <a:pt x="3294636" y="3000"/>
+                  </a:lnTo>
+                  <a:lnTo>
+                    <a:pt x="3223013" y="4496"/>
+                  </a:lnTo>
+                  <a:lnTo>
+                    <a:pt x="3151391" y="5990"/>
+                  </a:lnTo>
+                  <a:lnTo>
+                    <a:pt x="3079768" y="7481"/>
+                  </a:lnTo>
+                  <a:lnTo>
+                    <a:pt x="3008146" y="8969"/>
+                  </a:lnTo>
+                  <a:lnTo>
+                    <a:pt x="2936523" y="10454"/>
+                  </a:lnTo>
+                  <a:lnTo>
+                    <a:pt x="2864901" y="11937"/>
+                  </a:lnTo>
+                  <a:lnTo>
+                    <a:pt x="2793278" y="13417"/>
+                  </a:lnTo>
+                  <a:lnTo>
+                    <a:pt x="2721655" y="14895"/>
+                  </a:lnTo>
+                  <a:lnTo>
+                    <a:pt x="2650033" y="16369"/>
+                  </a:lnTo>
+                  <a:lnTo>
+                    <a:pt x="2578410" y="17841"/>
+                  </a:lnTo>
+                  <a:lnTo>
+                    <a:pt x="2506788" y="19311"/>
+                  </a:lnTo>
+                  <a:lnTo>
+                    <a:pt x="2435165" y="20777"/>
+                  </a:lnTo>
+                  <a:lnTo>
+                    <a:pt x="2363543" y="22241"/>
+                  </a:lnTo>
+                  <a:lnTo>
+                    <a:pt x="2291920" y="23703"/>
+                  </a:lnTo>
+                  <a:lnTo>
+                    <a:pt x="2220298" y="25161"/>
+                  </a:lnTo>
+                  <a:lnTo>
+                    <a:pt x="2148675" y="26618"/>
+                  </a:lnTo>
+                  <a:lnTo>
+                    <a:pt x="2077053" y="28071"/>
+                  </a:lnTo>
+                  <a:lnTo>
+                    <a:pt x="2005430" y="29522"/>
+                  </a:lnTo>
+                  <a:lnTo>
+                    <a:pt x="1933808" y="30970"/>
+                  </a:lnTo>
+                  <a:lnTo>
+                    <a:pt x="1862185" y="32416"/>
+                  </a:lnTo>
+                  <a:lnTo>
+                    <a:pt x="1790563" y="33859"/>
+                  </a:lnTo>
+                  <a:lnTo>
+                    <a:pt x="1718940" y="35299"/>
+                  </a:lnTo>
+                  <a:lnTo>
+                    <a:pt x="1647318" y="36737"/>
+                  </a:lnTo>
+                  <a:lnTo>
+                    <a:pt x="1575695" y="38172"/>
+                  </a:lnTo>
+                  <a:lnTo>
+                    <a:pt x="1504073" y="39604"/>
+                  </a:lnTo>
+                  <a:lnTo>
+                    <a:pt x="1432450" y="41034"/>
+                  </a:lnTo>
+                  <a:lnTo>
+                    <a:pt x="1360827" y="42461"/>
+                  </a:lnTo>
+                  <a:lnTo>
+                    <a:pt x="1289205" y="43886"/>
+                  </a:lnTo>
+                  <a:lnTo>
+                    <a:pt x="1217582" y="45308"/>
+                  </a:lnTo>
+                  <a:lnTo>
+                    <a:pt x="1145960" y="46728"/>
+                  </a:lnTo>
+                  <a:lnTo>
+                    <a:pt x="1074337" y="48145"/>
+                  </a:lnTo>
+                  <a:lnTo>
+                    <a:pt x="1002715" y="49559"/>
+                  </a:lnTo>
+                  <a:lnTo>
+                    <a:pt x="931092" y="50971"/>
+                  </a:lnTo>
+                  <a:lnTo>
+                    <a:pt x="859470" y="52381"/>
+                  </a:lnTo>
+                  <a:lnTo>
+                    <a:pt x="787847" y="53787"/>
+                  </a:lnTo>
+                  <a:lnTo>
+                    <a:pt x="716225" y="55192"/>
+                  </a:lnTo>
+                  <a:lnTo>
+                    <a:pt x="644602" y="56593"/>
+                  </a:lnTo>
+                  <a:lnTo>
+                    <a:pt x="572980" y="57992"/>
+                  </a:lnTo>
+                  <a:lnTo>
+                    <a:pt x="501357" y="59389"/>
+                  </a:lnTo>
+                  <a:lnTo>
+                    <a:pt x="429735" y="60783"/>
+                  </a:lnTo>
+                  <a:lnTo>
+                    <a:pt x="358112" y="62175"/>
+                  </a:lnTo>
+                  <a:lnTo>
+                    <a:pt x="286490" y="63564"/>
+                  </a:lnTo>
+                  <a:lnTo>
+                    <a:pt x="214867" y="64950"/>
+                  </a:lnTo>
+                  <a:lnTo>
+                    <a:pt x="143245" y="66334"/>
+                  </a:lnTo>
+                  <a:lnTo>
+                    <a:pt x="71622" y="67716"/>
+                  </a:lnTo>
+                  <a:lnTo>
+                    <a:pt x="0" y="69095"/>
                   </a:lnTo>
                 </a:path>
               </a:pathLst>
@@ -4164,291 +4164,294 @@
           </p:nvSpPr>
           <p:spPr>
             <a:xfrm>
-              <a:off x="1717018" y="2073503"/>
-              <a:ext cx="6545660" cy="3344756"/>
+              <a:off x="1608556" y="2073503"/>
+              <a:ext cx="6654122" cy="3333137"/>
             </a:xfrm>
             <a:custGeom>
               <a:avLst/>
               <a:pathLst>
-                <a:path w="6545660" h="3344756">
+                <a:path w="6654122" h="3333137">
                   <a:moveTo>
                     <a:pt x="0" y="0"/>
                   </a:moveTo>
                   <a:lnTo>
-                    <a:pt x="28011" y="48203"/>
-                  </a:lnTo>
-                  <a:lnTo>
-                    <a:pt x="99633" y="167188"/>
-                  </a:lnTo>
-                  <a:lnTo>
-                    <a:pt x="171256" y="282053"/>
-                  </a:lnTo>
-                  <a:lnTo>
-                    <a:pt x="242878" y="392939"/>
-                  </a:lnTo>
-                  <a:lnTo>
-                    <a:pt x="314501" y="499985"/>
-                  </a:lnTo>
-                  <a:lnTo>
-                    <a:pt x="386123" y="603323"/>
-                  </a:lnTo>
-                  <a:lnTo>
-                    <a:pt x="457746" y="703082"/>
-                  </a:lnTo>
-                  <a:lnTo>
-                    <a:pt x="529368" y="799387"/>
-                  </a:lnTo>
-                  <a:lnTo>
-                    <a:pt x="600991" y="892356"/>
-                  </a:lnTo>
-                  <a:lnTo>
-                    <a:pt x="672613" y="982105"/>
-                  </a:lnTo>
-                  <a:lnTo>
-                    <a:pt x="744236" y="1068746"/>
-                  </a:lnTo>
-                  <a:lnTo>
-                    <a:pt x="815858" y="1152386"/>
-                  </a:lnTo>
-                  <a:lnTo>
-                    <a:pt x="887481" y="1233129"/>
-                  </a:lnTo>
-                  <a:lnTo>
-                    <a:pt x="959103" y="1311076"/>
-                  </a:lnTo>
-                  <a:lnTo>
-                    <a:pt x="1030726" y="1386323"/>
-                  </a:lnTo>
-                  <a:lnTo>
-                    <a:pt x="1102348" y="1458965"/>
-                  </a:lnTo>
-                  <a:lnTo>
-                    <a:pt x="1173971" y="1529090"/>
-                  </a:lnTo>
-                  <a:lnTo>
-                    <a:pt x="1245594" y="1596787"/>
-                  </a:lnTo>
-                  <a:lnTo>
-                    <a:pt x="1317216" y="1662139"/>
-                  </a:lnTo>
-                  <a:lnTo>
-                    <a:pt x="1388839" y="1725228"/>
-                  </a:lnTo>
-                  <a:lnTo>
-                    <a:pt x="1460461" y="1786132"/>
-                  </a:lnTo>
-                  <a:lnTo>
-                    <a:pt x="1532084" y="1844926"/>
-                  </a:lnTo>
-                  <a:lnTo>
-                    <a:pt x="1603706" y="1901684"/>
-                  </a:lnTo>
-                  <a:lnTo>
-                    <a:pt x="1675329" y="1956477"/>
-                  </a:lnTo>
-                  <a:lnTo>
-                    <a:pt x="1746951" y="2009372"/>
-                  </a:lnTo>
-                  <a:lnTo>
-                    <a:pt x="1818574" y="2060435"/>
-                  </a:lnTo>
-                  <a:lnTo>
-                    <a:pt x="1890196" y="2109729"/>
-                  </a:lnTo>
-                  <a:lnTo>
-                    <a:pt x="1961819" y="2157316"/>
-                  </a:lnTo>
-                  <a:lnTo>
-                    <a:pt x="2033441" y="2203255"/>
-                  </a:lnTo>
-                  <a:lnTo>
-                    <a:pt x="2105064" y="2247603"/>
-                  </a:lnTo>
-                  <a:lnTo>
-                    <a:pt x="2176686" y="2290415"/>
-                  </a:lnTo>
-                  <a:lnTo>
-                    <a:pt x="2248309" y="2331745"/>
-                  </a:lnTo>
-                  <a:lnTo>
-                    <a:pt x="2319931" y="2371642"/>
-                  </a:lnTo>
-                  <a:lnTo>
-                    <a:pt x="2391554" y="2410159"/>
-                  </a:lnTo>
-                  <a:lnTo>
-                    <a:pt x="2463176" y="2447341"/>
-                  </a:lnTo>
-                  <a:lnTo>
-                    <a:pt x="2534799" y="2483235"/>
-                  </a:lnTo>
-                  <a:lnTo>
-                    <a:pt x="2606422" y="2517887"/>
-                  </a:lnTo>
-                  <a:lnTo>
-                    <a:pt x="2678044" y="2551338"/>
-                  </a:lnTo>
-                  <a:lnTo>
-                    <a:pt x="2749667" y="2583630"/>
-                  </a:lnTo>
-                  <a:lnTo>
-                    <a:pt x="2821289" y="2614805"/>
-                  </a:lnTo>
-                  <a:lnTo>
-                    <a:pt x="2892912" y="2644899"/>
-                  </a:lnTo>
-                  <a:lnTo>
-                    <a:pt x="2964534" y="2673951"/>
-                  </a:lnTo>
-                  <a:lnTo>
-                    <a:pt x="3036157" y="2701998"/>
-                  </a:lnTo>
-                  <a:lnTo>
-                    <a:pt x="3107779" y="2729072"/>
-                  </a:lnTo>
-                  <a:lnTo>
-                    <a:pt x="3179402" y="2755209"/>
-                  </a:lnTo>
-                  <a:lnTo>
-                    <a:pt x="3251024" y="2780441"/>
-                  </a:lnTo>
-                  <a:lnTo>
-                    <a:pt x="3322647" y="2804799"/>
-                  </a:lnTo>
-                  <a:lnTo>
-                    <a:pt x="3394269" y="2828314"/>
-                  </a:lnTo>
-                  <a:lnTo>
-                    <a:pt x="3465892" y="2851014"/>
-                  </a:lnTo>
-                  <a:lnTo>
-                    <a:pt x="3537514" y="2872927"/>
-                  </a:lnTo>
-                  <a:lnTo>
-                    <a:pt x="3609137" y="2894082"/>
-                  </a:lnTo>
-                  <a:lnTo>
-                    <a:pt x="3680759" y="2914504"/>
-                  </a:lnTo>
-                  <a:lnTo>
-                    <a:pt x="3752382" y="2934219"/>
-                  </a:lnTo>
-                  <a:lnTo>
-                    <a:pt x="3824004" y="2953251"/>
-                  </a:lnTo>
-                  <a:lnTo>
-                    <a:pt x="3895627" y="2971624"/>
-                  </a:lnTo>
-                  <a:lnTo>
-                    <a:pt x="3967250" y="2989361"/>
-                  </a:lnTo>
-                  <a:lnTo>
-                    <a:pt x="4038872" y="3006483"/>
-                  </a:lnTo>
-                  <a:lnTo>
-                    <a:pt x="4110495" y="3023013"/>
-                  </a:lnTo>
-                  <a:lnTo>
-                    <a:pt x="4182117" y="3038970"/>
-                  </a:lnTo>
-                  <a:lnTo>
-                    <a:pt x="4253740" y="3054374"/>
-                  </a:lnTo>
-                  <a:lnTo>
-                    <a:pt x="4325362" y="3069244"/>
-                  </a:lnTo>
-                  <a:lnTo>
-                    <a:pt x="4396985" y="3083600"/>
-                  </a:lnTo>
-                  <a:lnTo>
-                    <a:pt x="4468607" y="3097459"/>
-                  </a:lnTo>
-                  <a:lnTo>
-                    <a:pt x="4540230" y="3110837"/>
-                  </a:lnTo>
-                  <a:lnTo>
-                    <a:pt x="4611852" y="3123752"/>
-                  </a:lnTo>
-                  <a:lnTo>
-                    <a:pt x="4683475" y="3136220"/>
-                  </a:lnTo>
-                  <a:lnTo>
-                    <a:pt x="4755097" y="3148256"/>
-                  </a:lnTo>
-                  <a:lnTo>
-                    <a:pt x="4826720" y="3159876"/>
-                  </a:lnTo>
-                  <a:lnTo>
-                    <a:pt x="4898342" y="3171092"/>
-                  </a:lnTo>
-                  <a:lnTo>
-                    <a:pt x="4969965" y="3181921"/>
-                  </a:lnTo>
-                  <a:lnTo>
-                    <a:pt x="5041587" y="3192374"/>
-                  </a:lnTo>
-                  <a:lnTo>
-                    <a:pt x="5113210" y="3202465"/>
-                  </a:lnTo>
-                  <a:lnTo>
-                    <a:pt x="5184832" y="3212207"/>
-                  </a:lnTo>
-                  <a:lnTo>
-                    <a:pt x="5256455" y="3221611"/>
-                  </a:lnTo>
-                  <a:lnTo>
-                    <a:pt x="5328078" y="3230690"/>
-                  </a:lnTo>
-                  <a:lnTo>
-                    <a:pt x="5399700" y="3239454"/>
-                  </a:lnTo>
-                  <a:lnTo>
-                    <a:pt x="5471323" y="3247915"/>
-                  </a:lnTo>
-                  <a:lnTo>
-                    <a:pt x="5542945" y="3256083"/>
-                  </a:lnTo>
-                  <a:lnTo>
-                    <a:pt x="5614568" y="3263968"/>
-                  </a:lnTo>
-                  <a:lnTo>
-                    <a:pt x="5686190" y="3271579"/>
-                  </a:lnTo>
-                  <a:lnTo>
-                    <a:pt x="5757813" y="3278927"/>
-                  </a:lnTo>
-                  <a:lnTo>
-                    <a:pt x="5829435" y="3286021"/>
-                  </a:lnTo>
-                  <a:lnTo>
-                    <a:pt x="5901058" y="3292869"/>
-                  </a:lnTo>
-                  <a:lnTo>
-                    <a:pt x="5972680" y="3299480"/>
-                  </a:lnTo>
-                  <a:lnTo>
-                    <a:pt x="6044303" y="3305862"/>
-                  </a:lnTo>
-                  <a:lnTo>
-                    <a:pt x="6115925" y="3312022"/>
-                  </a:lnTo>
-                  <a:lnTo>
-                    <a:pt x="6187548" y="3317970"/>
-                  </a:lnTo>
-                  <a:lnTo>
-                    <a:pt x="6259170" y="3323711"/>
-                  </a:lnTo>
-                  <a:lnTo>
-                    <a:pt x="6330793" y="3329254"/>
-                  </a:lnTo>
-                  <a:lnTo>
-                    <a:pt x="6402415" y="3334604"/>
-                  </a:lnTo>
-                  <a:lnTo>
-                    <a:pt x="6474038" y="3339770"/>
-                  </a:lnTo>
-                  <a:lnTo>
-                    <a:pt x="6545660" y="3344756"/>
+                    <a:pt x="64850" y="105196"/>
+                  </a:lnTo>
+                  <a:lnTo>
+                    <a:pt x="136472" y="217515"/>
+                  </a:lnTo>
+                  <a:lnTo>
+                    <a:pt x="208095" y="326100"/>
+                  </a:lnTo>
+                  <a:lnTo>
+                    <a:pt x="279717" y="431075"/>
+                  </a:lnTo>
+                  <a:lnTo>
+                    <a:pt x="351340" y="532560"/>
+                  </a:lnTo>
+                  <a:lnTo>
+                    <a:pt x="422963" y="630672"/>
+                  </a:lnTo>
+                  <a:lnTo>
+                    <a:pt x="494585" y="725521"/>
+                  </a:lnTo>
+                  <a:lnTo>
+                    <a:pt x="566208" y="817218"/>
+                  </a:lnTo>
+                  <a:lnTo>
+                    <a:pt x="637830" y="905866"/>
+                  </a:lnTo>
+                  <a:lnTo>
+                    <a:pt x="709453" y="991567"/>
+                  </a:lnTo>
+                  <a:lnTo>
+                    <a:pt x="781075" y="1074419"/>
+                  </a:lnTo>
+                  <a:lnTo>
+                    <a:pt x="852698" y="1154516"/>
+                  </a:lnTo>
+                  <a:lnTo>
+                    <a:pt x="924320" y="1231951"/>
+                  </a:lnTo>
+                  <a:lnTo>
+                    <a:pt x="995943" y="1306811"/>
+                  </a:lnTo>
+                  <a:lnTo>
+                    <a:pt x="1067565" y="1379183"/>
+                  </a:lnTo>
+                  <a:lnTo>
+                    <a:pt x="1139188" y="1449148"/>
+                  </a:lnTo>
+                  <a:lnTo>
+                    <a:pt x="1210810" y="1516788"/>
+                  </a:lnTo>
+                  <a:lnTo>
+                    <a:pt x="1282433" y="1582179"/>
+                  </a:lnTo>
+                  <a:lnTo>
+                    <a:pt x="1354055" y="1645396"/>
+                  </a:lnTo>
+                  <a:lnTo>
+                    <a:pt x="1425678" y="1706512"/>
+                  </a:lnTo>
+                  <a:lnTo>
+                    <a:pt x="1497300" y="1765595"/>
+                  </a:lnTo>
+                  <a:lnTo>
+                    <a:pt x="1568923" y="1822715"/>
+                  </a:lnTo>
+                  <a:lnTo>
+                    <a:pt x="1640545" y="1877935"/>
+                  </a:lnTo>
+                  <a:lnTo>
+                    <a:pt x="1712168" y="1931320"/>
+                  </a:lnTo>
+                  <a:lnTo>
+                    <a:pt x="1783791" y="1982930"/>
+                  </a:lnTo>
+                  <a:lnTo>
+                    <a:pt x="1855413" y="2032824"/>
+                  </a:lnTo>
+                  <a:lnTo>
+                    <a:pt x="1927036" y="2081060"/>
+                  </a:lnTo>
+                  <a:lnTo>
+                    <a:pt x="1998658" y="2127692"/>
+                  </a:lnTo>
+                  <a:lnTo>
+                    <a:pt x="2070281" y="2172774"/>
+                  </a:lnTo>
+                  <a:lnTo>
+                    <a:pt x="2141903" y="2216357"/>
+                  </a:lnTo>
+                  <a:lnTo>
+                    <a:pt x="2213526" y="2258491"/>
+                  </a:lnTo>
+                  <a:lnTo>
+                    <a:pt x="2285148" y="2299224"/>
+                  </a:lnTo>
+                  <a:lnTo>
+                    <a:pt x="2356771" y="2338603"/>
+                  </a:lnTo>
+                  <a:lnTo>
+                    <a:pt x="2428393" y="2376673"/>
+                  </a:lnTo>
+                  <a:lnTo>
+                    <a:pt x="2500016" y="2413477"/>
+                  </a:lnTo>
+                  <a:lnTo>
+                    <a:pt x="2571638" y="2449058"/>
+                  </a:lnTo>
+                  <a:lnTo>
+                    <a:pt x="2643261" y="2483456"/>
+                  </a:lnTo>
+                  <a:lnTo>
+                    <a:pt x="2714883" y="2516711"/>
+                  </a:lnTo>
+                  <a:lnTo>
+                    <a:pt x="2786506" y="2548859"/>
+                  </a:lnTo>
+                  <a:lnTo>
+                    <a:pt x="2858128" y="2579939"/>
+                  </a:lnTo>
+                  <a:lnTo>
+                    <a:pt x="2929751" y="2609986"/>
+                  </a:lnTo>
+                  <a:lnTo>
+                    <a:pt x="3001373" y="2639034"/>
+                  </a:lnTo>
+                  <a:lnTo>
+                    <a:pt x="3072996" y="2667116"/>
+                  </a:lnTo>
+                  <a:lnTo>
+                    <a:pt x="3144619" y="2694265"/>
+                  </a:lnTo>
+                  <a:lnTo>
+                    <a:pt x="3216241" y="2720511"/>
+                  </a:lnTo>
+                  <a:lnTo>
+                    <a:pt x="3287864" y="2745885"/>
+                  </a:lnTo>
+                  <a:lnTo>
+                    <a:pt x="3359486" y="2770415"/>
+                  </a:lnTo>
+                  <a:lnTo>
+                    <a:pt x="3431109" y="2794129"/>
+                  </a:lnTo>
+                  <a:lnTo>
+                    <a:pt x="3502731" y="2817055"/>
+                  </a:lnTo>
+                  <a:lnTo>
+                    <a:pt x="3574354" y="2839219"/>
+                  </a:lnTo>
+                  <a:lnTo>
+                    <a:pt x="3645976" y="2860647"/>
+                  </a:lnTo>
+                  <a:lnTo>
+                    <a:pt x="3717599" y="2881361"/>
+                  </a:lnTo>
+                  <a:lnTo>
+                    <a:pt x="3789221" y="2901387"/>
+                  </a:lnTo>
+                  <a:lnTo>
+                    <a:pt x="3860844" y="2920748"/>
+                  </a:lnTo>
+                  <a:lnTo>
+                    <a:pt x="3932466" y="2939465"/>
+                  </a:lnTo>
+                  <a:lnTo>
+                    <a:pt x="4004089" y="2957559"/>
+                  </a:lnTo>
+                  <a:lnTo>
+                    <a:pt x="4075711" y="2975052"/>
+                  </a:lnTo>
+                  <a:lnTo>
+                    <a:pt x="4147334" y="2991963"/>
+                  </a:lnTo>
+                  <a:lnTo>
+                    <a:pt x="4218956" y="3008313"/>
+                  </a:lnTo>
+                  <a:lnTo>
+                    <a:pt x="4290579" y="3024118"/>
+                  </a:lnTo>
+                  <a:lnTo>
+                    <a:pt x="4362201" y="3039399"/>
+                  </a:lnTo>
+                  <a:lnTo>
+                    <a:pt x="4433824" y="3054171"/>
+                  </a:lnTo>
+                  <a:lnTo>
+                    <a:pt x="4505447" y="3068452"/>
+                  </a:lnTo>
+                  <a:lnTo>
+                    <a:pt x="4577069" y="3082258"/>
+                  </a:lnTo>
+                  <a:lnTo>
+                    <a:pt x="4648692" y="3095606"/>
+                  </a:lnTo>
+                  <a:lnTo>
+                    <a:pt x="4720314" y="3108509"/>
+                  </a:lnTo>
+                  <a:lnTo>
+                    <a:pt x="4791937" y="3120984"/>
+                  </a:lnTo>
+                  <a:lnTo>
+                    <a:pt x="4863559" y="3133044"/>
+                  </a:lnTo>
+                  <a:lnTo>
+                    <a:pt x="4935182" y="3144703"/>
+                  </a:lnTo>
+                  <a:lnTo>
+                    <a:pt x="5006804" y="3155974"/>
+                  </a:lnTo>
+                  <a:lnTo>
+                    <a:pt x="5078427" y="3166871"/>
+                  </a:lnTo>
+                  <a:lnTo>
+                    <a:pt x="5150049" y="3177405"/>
+                  </a:lnTo>
+                  <a:lnTo>
+                    <a:pt x="5221672" y="3187590"/>
+                  </a:lnTo>
+                  <a:lnTo>
+                    <a:pt x="5293294" y="3197435"/>
+                  </a:lnTo>
+                  <a:lnTo>
+                    <a:pt x="5364917" y="3206954"/>
+                  </a:lnTo>
+                  <a:lnTo>
+                    <a:pt x="5436539" y="3216156"/>
+                  </a:lnTo>
+                  <a:lnTo>
+                    <a:pt x="5508162" y="3225052"/>
+                  </a:lnTo>
+                  <a:lnTo>
+                    <a:pt x="5579784" y="3233652"/>
+                  </a:lnTo>
+                  <a:lnTo>
+                    <a:pt x="5651407" y="3241966"/>
+                  </a:lnTo>
+                  <a:lnTo>
+                    <a:pt x="5723029" y="3250004"/>
+                  </a:lnTo>
+                  <a:lnTo>
+                    <a:pt x="5794652" y="3257775"/>
+                  </a:lnTo>
+                  <a:lnTo>
+                    <a:pt x="5866275" y="3265287"/>
+                  </a:lnTo>
+                  <a:lnTo>
+                    <a:pt x="5937897" y="3272550"/>
+                  </a:lnTo>
+                  <a:lnTo>
+                    <a:pt x="6009520" y="3279571"/>
+                  </a:lnTo>
+                  <a:lnTo>
+                    <a:pt x="6081142" y="3286359"/>
+                  </a:lnTo>
+                  <a:lnTo>
+                    <a:pt x="6152765" y="3292921"/>
+                  </a:lnTo>
+                  <a:lnTo>
+                    <a:pt x="6224387" y="3299265"/>
+                  </a:lnTo>
+                  <a:lnTo>
+                    <a:pt x="6296010" y="3305398"/>
+                  </a:lnTo>
+                  <a:lnTo>
+                    <a:pt x="6367632" y="3311327"/>
+                  </a:lnTo>
+                  <a:lnTo>
+                    <a:pt x="6439255" y="3317059"/>
+                  </a:lnTo>
+                  <a:lnTo>
+                    <a:pt x="6510877" y="3322600"/>
+                  </a:lnTo>
+                  <a:lnTo>
+                    <a:pt x="6582500" y="3327958"/>
+                  </a:lnTo>
+                  <a:lnTo>
+                    <a:pt x="6654122" y="3333137"/>
                   </a:lnTo>
                 </a:path>
               </a:pathLst>
@@ -4520,7 +4523,7 @@
           </p:nvSpPr>
           <p:spPr>
             <a:xfrm>
-              <a:off x="4632789" y="2073503"/>
+              <a:off x="4648520" y="2073503"/>
               <a:ext cx="0" cy="3649639"/>
             </a:xfrm>
             <a:custGeom>
@@ -4563,7 +4566,7 @@
           </p:nvSpPr>
           <p:spPr>
             <a:xfrm>
-              <a:off x="3519238" y="2073503"/>
+              <a:off x="3510041" y="2073503"/>
               <a:ext cx="0" cy="3649639"/>
             </a:xfrm>
             <a:custGeom>
@@ -4606,7 +4609,7 @@
           </p:nvSpPr>
           <p:spPr>
             <a:xfrm>
-              <a:off x="5667105" y="2073503"/>
+              <a:off x="5671562" y="2073503"/>
               <a:ext cx="0" cy="3649639"/>
             </a:xfrm>
             <a:custGeom>
@@ -4879,7 +4882,7 @@
           </p:nvSpPr>
           <p:spPr>
             <a:xfrm>
-              <a:off x="1701509" y="5785772"/>
+              <a:off x="1701133" y="5785772"/>
               <a:ext cx="161574" cy="80101"/>
             </a:xfrm>
             <a:prstGeom prst="rect">
@@ -4925,7 +4928,7 @@
           </p:nvSpPr>
           <p:spPr>
             <a:xfrm>
-              <a:off x="3528691" y="5785772"/>
+              <a:off x="3525106" y="5785772"/>
               <a:ext cx="161574" cy="80101"/>
             </a:xfrm>
             <a:prstGeom prst="rect">
@@ -4971,7 +4974,7 @@
           </p:nvSpPr>
           <p:spPr>
             <a:xfrm>
-              <a:off x="5405571" y="5785772"/>
+              <a:off x="5398776" y="5785772"/>
               <a:ext cx="62179" cy="80101"/>
             </a:xfrm>
             <a:prstGeom prst="rect">
@@ -5017,7 +5020,7 @@
           </p:nvSpPr>
           <p:spPr>
             <a:xfrm>
-              <a:off x="7201663" y="5785772"/>
+              <a:off x="7191659" y="5785772"/>
               <a:ext cx="124358" cy="80101"/>
             </a:xfrm>
             <a:prstGeom prst="rect">
@@ -5188,7 +5191,7 @@
                   <a:latin typeface="Helvetica"/>
                   <a:cs typeface="Helvetica"/>
                 </a:rPr>
-                <a:t>subHR per 10 % decline: 1.57 (1.00-2.45), p_Bonf = 0.293 (n = 6)  |  per IQR decline (Δ = 23.5 %): 2.88 (1.01-8.24)  |  IQR: [-21.0, 2.5] %</a:t>
+                <a:t>subHR per 10 % decline: 1.54 (0.98-2.42), p_Bonf = 0.377 (n = 6)  |  per IQR decline (Δ = 23.7 %): 2.77 (0.95-8.13)  |  IQR: [-21.1, 2.7] %</a:t>
               </a:r>
             </a:p>
           </p:txBody>
